--- a/docs/slides/12-slides-mon-hoc.pptx
+++ b/docs/slides/12-slides-mon-hoc.pptx
@@ -17,23 +17,27 @@
     <p:sldId id="265" r:id="rId14"/>
     <p:sldId id="266" r:id="rId15"/>
     <p:sldId id="267" r:id="rId16"/>
+    <p:sldId id="268" r:id="rId17"/>
+    <p:sldId id="269" r:id="rId18"/>
+    <p:sldId id="270" r:id="rId19"/>
+    <p:sldId id="271" r:id="rId20"/>
   </p:sldIdLst>
   <p:sldSz cx="12192000" cy="6858000"/>
   <p:notesSz cx="6858000" cy="9144000"/>
   <p:embeddedFontLst>
     <p:embeddedFont>
       <p:font typeface="Roboto"/>
-      <p:regular r:id="rId17"/>
-      <p:bold r:id="rId18"/>
-      <p:italic r:id="rId19"/>
-      <p:boldItalic r:id="rId20"/>
-    </p:embeddedFont>
-    <p:embeddedFont>
-      <p:font typeface="Open Sans"/>
       <p:regular r:id="rId21"/>
       <p:bold r:id="rId22"/>
       <p:italic r:id="rId23"/>
       <p:boldItalic r:id="rId24"/>
+    </p:embeddedFont>
+    <p:embeddedFont>
+      <p:font typeface="Open Sans"/>
+      <p:regular r:id="rId25"/>
+      <p:bold r:id="rId26"/>
+      <p:italic r:id="rId27"/>
+      <p:boldItalic r:id="rId28"/>
     </p:embeddedFont>
   </p:embeddedFontLst>
   <p:defaultTextStyle>
@@ -267,7 +271,7 @@
   </p:defaultTextStyle>
   <p:extLst>
     <p:ext uri="GoogleSlidesCustomDataVersion2">
-      <go:slidesCustomData xmlns:go="http://customooxmlschemas.google.com/" roundtripDataSignature="AMtx7mhu5dURU4INwSlvEO7StWDXKr50jg==" r:id="rId25"/>
+      <go:slidesCustomData xmlns:go="http://customooxmlschemas.google.com/" roundtripDataSignature="AMtx7mhu5dURU4INwSlvEO7StWDXKr50jg==" r:id="rId29"/>
     </p:ext>
   </p:extLst>
 </p:presentation>
@@ -43959,6 +43963,1204 @@
   <p:cSld>
     <p:spTree>
       <p:nvGrpSpPr>
+        <p:cNvPr id="428" name="Shape 428"/>
+        <p:cNvGrpSpPr/>
+        <p:nvPr/>
+      </p:nvGrpSpPr>
+      <p:grpSpPr>
+        <a:xfrm>
+          <a:off x="0" y="0"/>
+          <a:ext cx="0" cy="0"/>
+          <a:chOff x="0" y="0"/>
+          <a:chExt cx="0" cy="0"/>
+        </a:xfrm>
+      </p:grpSpPr>
+      <p:sp>
+        <p:nvSpPr>
+          <p:cNvPr id="436" name="Google Shape;436;p31"/>
+          <p:cNvSpPr txBox="1"/>
+          <p:nvPr>
+            <p:ph type="title"/>
+          </p:nvPr>
+        </p:nvSpPr>
+        <p:spPr>
+          <a:xfrm>
+            <a:off x="771525" y="200025"/>
+            <a:ext cx="10582275" cy="790575"/>
+          </a:xfrm>
+          <a:prstGeom prst="rect">
+            <a:avLst/>
+          </a:prstGeom>
+          <a:noFill/>
+          <a:ln>
+            <a:noFill/>
+          </a:ln>
+        </p:spPr>
+        <p:txBody>
+          <a:bodyPr/>
+          <a:lstStyle/>
+          <a:p>
+            <a:pPr lvl="0" indent="0" marL="0">
+              <a:buNone/>
+            </a:pPr>
+            <a:r>
+              <a:rPr/>
+              <a:t>Khoảng cách nằm ở đâu</a:t>
+            </a:r>
+          </a:p>
+        </p:txBody>
+      </p:sp>
+      <p:sp>
+        <p:nvSpPr>
+          <p:cNvPr id="437" name="Google Shape;437;p31"/>
+          <p:cNvSpPr txBox="1"/>
+          <p:nvPr>
+            <p:ph idx="2" sz="half" type="body"/>
+          </p:nvPr>
+        </p:nvSpPr>
+        <p:spPr/>
+        <p:txBody>
+          <a:bodyPr/>
+          <a:lstStyle/>
+          <a:p>
+            <a:pPr lvl="0" indent="0" marL="0">
+              <a:buNone/>
+            </a:pPr>
+            <a:r>
+              <a:rPr/>
+              <a:t>Đo mức ký tự thì hai bố cục gần bằng nhau; đo cả chuỗi thì cách một trời một vực.</a:t>
+            </a:r>
+          </a:p>
+        </p:txBody>
+      </p:sp>
+      <p:pic>
+        <p:nvPicPr>
+          <p:cNvPr descr="figures/fig-ch4-layout.png" id="0" name="Picture 1"/>
+          <p:cNvPicPr>
+            <a:picLocks noGrp="1" noChangeAspect="1"/>
+          </p:cNvPicPr>
+          <p:nvPr/>
+        </p:nvPicPr>
+        <p:blipFill>
+          <a:blip r:embed="rId2"/>
+          <a:stretch>
+            <a:fillRect/>
+          </a:stretch>
+        </p:blipFill>
+        <p:spPr bwMode="auto">
+          <a:xfrm>
+            <a:off x="2489200" y="2324100"/>
+            <a:ext cx="7112000" cy="3848100"/>
+          </a:xfrm>
+          <a:prstGeom prst="rect">
+            <a:avLst/>
+          </a:prstGeom>
+          <a:noFill/>
+          <a:ln w="9525">
+            <a:noFill/>
+            <a:headEnd/>
+            <a:tailEnd/>
+          </a:ln>
+        </p:spPr>
+      </p:pic>
+      <p:sp>
+        <p:nvSpPr>
+          <p:cNvPr id="449" name="Google Shape;449;p31"/>
+          <p:cNvSpPr txBox="1"/>
+          <p:nvPr>
+            <p:ph idx="12" type="sldNum"/>
+          </p:nvPr>
+        </p:nvSpPr>
+        <p:spPr>
+          <a:xfrm>
+            <a:off x="58380" y="6508358"/>
+            <a:ext cx="349642" cy="349642"/>
+          </a:xfrm>
+          <a:prstGeom prst="rect">
+            <a:avLst/>
+          </a:prstGeom>
+          <a:noFill/>
+          <a:ln>
+            <a:noFill/>
+          </a:ln>
+        </p:spPr>
+        <p:txBody>
+          <a:bodyPr anchor="ctr" anchorCtr="0" bIns="45700" lIns="91425" rIns="91425" spcFirstLastPara="1" tIns="45700" wrap="square">
+            <a:noAutofit/>
+          </a:bodyPr>
+          <a:lstStyle>
+            <a:lvl1pPr algn="ctr" indent="0" lvl="0" marL="0">
+              <a:spcBef>
+                <a:spcPts val="0"/>
+              </a:spcBef>
+              <a:buNone/>
+              <a:defRPr sz="700">
+                <a:solidFill>
+                  <a:schemeClr val="dk1"/>
+                </a:solidFill>
+                <a:latin typeface="Arial"/>
+                <a:ea typeface="Arial"/>
+                <a:cs typeface="Arial"/>
+                <a:sym typeface="Arial"/>
+              </a:defRPr>
+            </a:lvl1pPr>
+            <a:lvl2pPr algn="ctr" indent="0" lvl="1" marL="0">
+              <a:spcBef>
+                <a:spcPts val="0"/>
+              </a:spcBef>
+              <a:buNone/>
+              <a:defRPr sz="700">
+                <a:solidFill>
+                  <a:schemeClr val="dk1"/>
+                </a:solidFill>
+                <a:latin typeface="Arial"/>
+                <a:ea typeface="Arial"/>
+                <a:cs typeface="Arial"/>
+                <a:sym typeface="Arial"/>
+              </a:defRPr>
+            </a:lvl2pPr>
+            <a:lvl3pPr algn="ctr" indent="0" lvl="2" marL="0">
+              <a:spcBef>
+                <a:spcPts val="0"/>
+              </a:spcBef>
+              <a:buNone/>
+              <a:defRPr sz="700">
+                <a:solidFill>
+                  <a:schemeClr val="dk1"/>
+                </a:solidFill>
+                <a:latin typeface="Arial"/>
+                <a:ea typeface="Arial"/>
+                <a:cs typeface="Arial"/>
+                <a:sym typeface="Arial"/>
+              </a:defRPr>
+            </a:lvl3pPr>
+            <a:lvl4pPr algn="ctr" indent="0" lvl="3" marL="0">
+              <a:spcBef>
+                <a:spcPts val="0"/>
+              </a:spcBef>
+              <a:buNone/>
+              <a:defRPr sz="700">
+                <a:solidFill>
+                  <a:schemeClr val="dk1"/>
+                </a:solidFill>
+                <a:latin typeface="Arial"/>
+                <a:ea typeface="Arial"/>
+                <a:cs typeface="Arial"/>
+                <a:sym typeface="Arial"/>
+              </a:defRPr>
+            </a:lvl4pPr>
+            <a:lvl5pPr algn="ctr" indent="0" lvl="4" marL="0">
+              <a:spcBef>
+                <a:spcPts val="0"/>
+              </a:spcBef>
+              <a:buNone/>
+              <a:defRPr sz="700">
+                <a:solidFill>
+                  <a:schemeClr val="dk1"/>
+                </a:solidFill>
+                <a:latin typeface="Arial"/>
+                <a:ea typeface="Arial"/>
+                <a:cs typeface="Arial"/>
+                <a:sym typeface="Arial"/>
+              </a:defRPr>
+            </a:lvl5pPr>
+            <a:lvl6pPr algn="ctr" indent="0" lvl="5" marL="0">
+              <a:spcBef>
+                <a:spcPts val="0"/>
+              </a:spcBef>
+              <a:buNone/>
+              <a:defRPr sz="700">
+                <a:solidFill>
+                  <a:schemeClr val="dk1"/>
+                </a:solidFill>
+                <a:latin typeface="Arial"/>
+                <a:ea typeface="Arial"/>
+                <a:cs typeface="Arial"/>
+                <a:sym typeface="Arial"/>
+              </a:defRPr>
+            </a:lvl6pPr>
+            <a:lvl7pPr algn="ctr" indent="0" lvl="6" marL="0">
+              <a:spcBef>
+                <a:spcPts val="0"/>
+              </a:spcBef>
+              <a:buNone/>
+              <a:defRPr sz="700">
+                <a:solidFill>
+                  <a:schemeClr val="dk1"/>
+                </a:solidFill>
+                <a:latin typeface="Arial"/>
+                <a:ea typeface="Arial"/>
+                <a:cs typeface="Arial"/>
+                <a:sym typeface="Arial"/>
+              </a:defRPr>
+            </a:lvl7pPr>
+            <a:lvl8pPr algn="ctr" indent="0" lvl="7" marL="0">
+              <a:spcBef>
+                <a:spcPts val="0"/>
+              </a:spcBef>
+              <a:buNone/>
+              <a:defRPr sz="700">
+                <a:solidFill>
+                  <a:schemeClr val="dk1"/>
+                </a:solidFill>
+                <a:latin typeface="Arial"/>
+                <a:ea typeface="Arial"/>
+                <a:cs typeface="Arial"/>
+                <a:sym typeface="Arial"/>
+              </a:defRPr>
+            </a:lvl8pPr>
+            <a:lvl9pPr algn="ctr" indent="0" lvl="8" marL="0">
+              <a:spcBef>
+                <a:spcPts val="0"/>
+              </a:spcBef>
+              <a:buNone/>
+              <a:defRPr sz="700">
+                <a:solidFill>
+                  <a:schemeClr val="dk1"/>
+                </a:solidFill>
+                <a:latin typeface="Arial"/>
+                <a:ea typeface="Arial"/>
+                <a:cs typeface="Arial"/>
+                <a:sym typeface="Arial"/>
+              </a:defRPr>
+            </a:lvl9pPr>
+          </a:lstStyle>
+          <a:p>
+            <a:pPr algn="ctr" indent="0" lvl="0" marL="0" rtl="0">
+              <a:spcBef>
+                <a:spcPts val="0"/>
+              </a:spcBef>
+              <a:spcAft>
+                <a:spcPts val="0"/>
+              </a:spcAft>
+              <a:buNone/>
+            </a:pPr>
+            <a:fld id="{00000000-1234-1234-1234-123412341234}" type="slidenum">
+              <a:rPr lang="en-US"/>
+              <a:t>‹#›</a:t>
+            </a:fld>
+            <a:endParaRPr/>
+          </a:p>
+        </p:txBody>
+      </p:sp>
+    </p:spTree>
+  </p:cSld>
+</p:sld>
+</file>
+
+<file path=ppt/slides/slide11.xml><?xml version="1.0" encoding="utf-8"?>
+<p:sld xmlns:a="http://schemas.openxmlformats.org/drawingml/2006/main" xmlns:r="http://schemas.openxmlformats.org/officeDocument/2006/relationships" xmlns:p="http://schemas.openxmlformats.org/presentationml/2006/main">
+  <p:cSld>
+    <p:spTree>
+      <p:nvGrpSpPr>
+        <p:cNvPr id="428" name="Shape 428"/>
+        <p:cNvGrpSpPr/>
+        <p:nvPr/>
+      </p:nvGrpSpPr>
+      <p:grpSpPr>
+        <a:xfrm>
+          <a:off x="0" y="0"/>
+          <a:ext cx="0" cy="0"/>
+          <a:chOff x="0" y="0"/>
+          <a:chExt cx="0" cy="0"/>
+        </a:xfrm>
+      </p:grpSpPr>
+      <p:sp>
+        <p:nvSpPr>
+          <p:cNvPr id="436" name="Google Shape;436;p31"/>
+          <p:cNvSpPr txBox="1"/>
+          <p:nvPr>
+            <p:ph type="title"/>
+          </p:nvPr>
+        </p:nvSpPr>
+        <p:spPr>
+          <a:xfrm>
+            <a:off x="771525" y="200025"/>
+            <a:ext cx="10582275" cy="790575"/>
+          </a:xfrm>
+          <a:prstGeom prst="rect">
+            <a:avLst/>
+          </a:prstGeom>
+          <a:noFill/>
+          <a:ln>
+            <a:noFill/>
+          </a:ln>
+        </p:spPr>
+        <p:txBody>
+          <a:bodyPr/>
+          <a:lstStyle/>
+          <a:p>
+            <a:pPr lvl="0" indent="0" marL="0">
+              <a:buNone/>
+            </a:pPr>
+            <a:r>
+              <a:rPr/>
+              <a:t>Lỗi trông như thế nào</a:t>
+            </a:r>
+          </a:p>
+        </p:txBody>
+      </p:sp>
+      <p:sp>
+        <p:nvSpPr>
+          <p:cNvPr id="437" name="Google Shape;437;p31"/>
+          <p:cNvSpPr txBox="1"/>
+          <p:nvPr>
+            <p:ph idx="2" sz="half" type="body"/>
+          </p:nvPr>
+        </p:nvSpPr>
+        <p:spPr/>
+        <p:txBody>
+          <a:bodyPr/>
+          <a:lstStyle/>
+          <a:p>
+            <a:pPr lvl="0" indent="0" marL="0">
+              <a:buNone/>
+            </a:pPr>
+            <a:r>
+              <a:rPr/>
+              <a:t>Ba ca hậu xử lý cứu được, ba ca vẫn sai — </a:t>
+            </a:r>
+            <a:r>
+              <a:rPr b="1"/>
+              <a:t>cả ba ca sai đều hỏng ở dòng trên</a:t>
+            </a:r>
+            <a:r>
+              <a:rPr/>
+              <a:t>.</a:t>
+            </a:r>
+          </a:p>
+        </p:txBody>
+      </p:sp>
+      <p:pic>
+        <p:nvPicPr>
+          <p:cNvPr descr="figures/fig-ch4-loi.png" id="0" name="Picture 1"/>
+          <p:cNvPicPr>
+            <a:picLocks noGrp="1" noChangeAspect="1"/>
+          </p:cNvPicPr>
+          <p:nvPr/>
+        </p:nvPicPr>
+        <p:blipFill>
+          <a:blip r:embed="rId2"/>
+          <a:stretch>
+            <a:fillRect/>
+          </a:stretch>
+        </p:blipFill>
+        <p:spPr bwMode="auto">
+          <a:xfrm>
+            <a:off x="2959100" y="2324100"/>
+            <a:ext cx="6184900" cy="3848100"/>
+          </a:xfrm>
+          <a:prstGeom prst="rect">
+            <a:avLst/>
+          </a:prstGeom>
+          <a:noFill/>
+          <a:ln w="9525">
+            <a:noFill/>
+            <a:headEnd/>
+            <a:tailEnd/>
+          </a:ln>
+        </p:spPr>
+      </p:pic>
+      <p:sp>
+        <p:nvSpPr>
+          <p:cNvPr id="449" name="Google Shape;449;p31"/>
+          <p:cNvSpPr txBox="1"/>
+          <p:nvPr>
+            <p:ph idx="12" type="sldNum"/>
+          </p:nvPr>
+        </p:nvSpPr>
+        <p:spPr>
+          <a:xfrm>
+            <a:off x="58380" y="6508358"/>
+            <a:ext cx="349642" cy="349642"/>
+          </a:xfrm>
+          <a:prstGeom prst="rect">
+            <a:avLst/>
+          </a:prstGeom>
+          <a:noFill/>
+          <a:ln>
+            <a:noFill/>
+          </a:ln>
+        </p:spPr>
+        <p:txBody>
+          <a:bodyPr anchor="ctr" anchorCtr="0" bIns="45700" lIns="91425" rIns="91425" spcFirstLastPara="1" tIns="45700" wrap="square">
+            <a:noAutofit/>
+          </a:bodyPr>
+          <a:lstStyle>
+            <a:lvl1pPr algn="ctr" indent="0" lvl="0" marL="0">
+              <a:spcBef>
+                <a:spcPts val="0"/>
+              </a:spcBef>
+              <a:buNone/>
+              <a:defRPr sz="700">
+                <a:solidFill>
+                  <a:schemeClr val="dk1"/>
+                </a:solidFill>
+                <a:latin typeface="Arial"/>
+                <a:ea typeface="Arial"/>
+                <a:cs typeface="Arial"/>
+                <a:sym typeface="Arial"/>
+              </a:defRPr>
+            </a:lvl1pPr>
+            <a:lvl2pPr algn="ctr" indent="0" lvl="1" marL="0">
+              <a:spcBef>
+                <a:spcPts val="0"/>
+              </a:spcBef>
+              <a:buNone/>
+              <a:defRPr sz="700">
+                <a:solidFill>
+                  <a:schemeClr val="dk1"/>
+                </a:solidFill>
+                <a:latin typeface="Arial"/>
+                <a:ea typeface="Arial"/>
+                <a:cs typeface="Arial"/>
+                <a:sym typeface="Arial"/>
+              </a:defRPr>
+            </a:lvl2pPr>
+            <a:lvl3pPr algn="ctr" indent="0" lvl="2" marL="0">
+              <a:spcBef>
+                <a:spcPts val="0"/>
+              </a:spcBef>
+              <a:buNone/>
+              <a:defRPr sz="700">
+                <a:solidFill>
+                  <a:schemeClr val="dk1"/>
+                </a:solidFill>
+                <a:latin typeface="Arial"/>
+                <a:ea typeface="Arial"/>
+                <a:cs typeface="Arial"/>
+                <a:sym typeface="Arial"/>
+              </a:defRPr>
+            </a:lvl3pPr>
+            <a:lvl4pPr algn="ctr" indent="0" lvl="3" marL="0">
+              <a:spcBef>
+                <a:spcPts val="0"/>
+              </a:spcBef>
+              <a:buNone/>
+              <a:defRPr sz="700">
+                <a:solidFill>
+                  <a:schemeClr val="dk1"/>
+                </a:solidFill>
+                <a:latin typeface="Arial"/>
+                <a:ea typeface="Arial"/>
+                <a:cs typeface="Arial"/>
+                <a:sym typeface="Arial"/>
+              </a:defRPr>
+            </a:lvl4pPr>
+            <a:lvl5pPr algn="ctr" indent="0" lvl="4" marL="0">
+              <a:spcBef>
+                <a:spcPts val="0"/>
+              </a:spcBef>
+              <a:buNone/>
+              <a:defRPr sz="700">
+                <a:solidFill>
+                  <a:schemeClr val="dk1"/>
+                </a:solidFill>
+                <a:latin typeface="Arial"/>
+                <a:ea typeface="Arial"/>
+                <a:cs typeface="Arial"/>
+                <a:sym typeface="Arial"/>
+              </a:defRPr>
+            </a:lvl5pPr>
+            <a:lvl6pPr algn="ctr" indent="0" lvl="5" marL="0">
+              <a:spcBef>
+                <a:spcPts val="0"/>
+              </a:spcBef>
+              <a:buNone/>
+              <a:defRPr sz="700">
+                <a:solidFill>
+                  <a:schemeClr val="dk1"/>
+                </a:solidFill>
+                <a:latin typeface="Arial"/>
+                <a:ea typeface="Arial"/>
+                <a:cs typeface="Arial"/>
+                <a:sym typeface="Arial"/>
+              </a:defRPr>
+            </a:lvl6pPr>
+            <a:lvl7pPr algn="ctr" indent="0" lvl="6" marL="0">
+              <a:spcBef>
+                <a:spcPts val="0"/>
+              </a:spcBef>
+              <a:buNone/>
+              <a:defRPr sz="700">
+                <a:solidFill>
+                  <a:schemeClr val="dk1"/>
+                </a:solidFill>
+                <a:latin typeface="Arial"/>
+                <a:ea typeface="Arial"/>
+                <a:cs typeface="Arial"/>
+                <a:sym typeface="Arial"/>
+              </a:defRPr>
+            </a:lvl7pPr>
+            <a:lvl8pPr algn="ctr" indent="0" lvl="7" marL="0">
+              <a:spcBef>
+                <a:spcPts val="0"/>
+              </a:spcBef>
+              <a:buNone/>
+              <a:defRPr sz="700">
+                <a:solidFill>
+                  <a:schemeClr val="dk1"/>
+                </a:solidFill>
+                <a:latin typeface="Arial"/>
+                <a:ea typeface="Arial"/>
+                <a:cs typeface="Arial"/>
+                <a:sym typeface="Arial"/>
+              </a:defRPr>
+            </a:lvl8pPr>
+            <a:lvl9pPr algn="ctr" indent="0" lvl="8" marL="0">
+              <a:spcBef>
+                <a:spcPts val="0"/>
+              </a:spcBef>
+              <a:buNone/>
+              <a:defRPr sz="700">
+                <a:solidFill>
+                  <a:schemeClr val="dk1"/>
+                </a:solidFill>
+                <a:latin typeface="Arial"/>
+                <a:ea typeface="Arial"/>
+                <a:cs typeface="Arial"/>
+                <a:sym typeface="Arial"/>
+              </a:defRPr>
+            </a:lvl9pPr>
+          </a:lstStyle>
+          <a:p>
+            <a:pPr algn="ctr" indent="0" lvl="0" marL="0" rtl="0">
+              <a:spcBef>
+                <a:spcPts val="0"/>
+              </a:spcBef>
+              <a:spcAft>
+                <a:spcPts val="0"/>
+              </a:spcAft>
+              <a:buNone/>
+            </a:pPr>
+            <a:fld id="{00000000-1234-1234-1234-123412341234}" type="slidenum">
+              <a:rPr lang="en-US"/>
+              <a:t>‹#›</a:t>
+            </a:fld>
+            <a:endParaRPr/>
+          </a:p>
+        </p:txBody>
+      </p:sp>
+    </p:spTree>
+  </p:cSld>
+</p:sld>
+</file>
+
+<file path=ppt/slides/slide12.xml><?xml version="1.0" encoding="utf-8"?>
+<p:sld xmlns:a="http://schemas.openxmlformats.org/drawingml/2006/main" xmlns:r="http://schemas.openxmlformats.org/officeDocument/2006/relationships" xmlns:p="http://schemas.openxmlformats.org/presentationml/2006/main">
+  <p:cSld>
+    <p:spTree>
+      <p:nvGrpSpPr>
+        <p:cNvPr id="428" name="Shape 428"/>
+        <p:cNvGrpSpPr/>
+        <p:nvPr/>
+      </p:nvGrpSpPr>
+      <p:grpSpPr>
+        <a:xfrm>
+          <a:off x="0" y="0"/>
+          <a:ext cx="0" cy="0"/>
+          <a:chOff x="0" y="0"/>
+          <a:chExt cx="0" cy="0"/>
+        </a:xfrm>
+      </p:grpSpPr>
+      <p:sp>
+        <p:nvSpPr>
+          <p:cNvPr id="436" name="Google Shape;436;p31"/>
+          <p:cNvSpPr txBox="1"/>
+          <p:nvPr>
+            <p:ph type="title"/>
+          </p:nvPr>
+        </p:nvSpPr>
+        <p:spPr>
+          <a:xfrm>
+            <a:off x="771525" y="200025"/>
+            <a:ext cx="10582275" cy="790575"/>
+          </a:xfrm>
+          <a:prstGeom prst="rect">
+            <a:avLst/>
+          </a:prstGeom>
+          <a:noFill/>
+          <a:ln>
+            <a:noFill/>
+          </a:ln>
+        </p:spPr>
+        <p:txBody>
+          <a:bodyPr/>
+          <a:lstStyle/>
+          <a:p>
+            <a:pPr lvl="0" indent="0" marL="0">
+              <a:buNone/>
+            </a:pPr>
+            <a:r>
+              <a:rPr/>
+              <a:t>Bóc tách đóng góp của từng bước</a:t>
+            </a:r>
+          </a:p>
+        </p:txBody>
+      </p:sp>
+      <p:sp>
+        <p:nvSpPr>
+          <p:cNvPr id="437" name="Google Shape;437;p31"/>
+          <p:cNvSpPr txBox="1"/>
+          <p:nvPr>
+            <p:ph idx="2" sz="half" type="body"/>
+          </p:nvPr>
+        </p:nvSpPr>
+        <p:spPr/>
+        <p:txBody>
+          <a:bodyPr/>
+          <a:lstStyle/>
+          <a:p>
+            <a:pPr lvl="0" indent="0" marL="0">
+              <a:buNone/>
+            </a:pPr>
+            <a:r>
+              <a:rPr/>
+              <a:t>Mọi bước bật tắt độc lập, nên đóng góp của từng bước </a:t>
+            </a:r>
+            <a:r>
+              <a:rPr b="1"/>
+              <a:t>đo được riêng</a:t>
+            </a:r>
+            <a:r>
+              <a:rPr/>
+              <a:t> — kể cả khi bằng 0.</a:t>
+            </a:r>
+          </a:p>
+        </p:txBody>
+      </p:sp>
+      <p:graphicFrame>
+        <p:nvGraphicFramePr>
+          <p:cNvPr id="6" name="Content Placeholder 5"/>
+          <p:cNvGraphicFramePr>
+            <a:graphicFrameLocks noGrp="1"/>
+          </p:cNvGraphicFramePr>
+          <p:nvPr>
+            <p:ph idx="1"/>
+          </p:nvPr>
+        </p:nvGraphicFramePr>
+        <p:xfrm>
+          <a:off x="762000" y="2324100"/>
+          <a:ext cx="10579100" cy="3848100"/>
+        </p:xfrm>
+        <a:graphic>
+          <a:graphicData uri="http://schemas.openxmlformats.org/drawingml/2006/table">
+            <a:tbl>
+              <a:tblPr firstRow="1" bandRow="1">
+                <a:tableStyleId>{45BEF19B-5B1D-4A26-B267-ECC71EF7E2D4}</a:tableStyleId>
+              </a:tblPr>
+              <a:tblGrid>
+                <a:gridCol w="3517900"/>
+                <a:gridCol w="3517900"/>
+                <a:gridCol w="3517900"/>
+              </a:tblGrid>
+              <a:tr h="0">
+                <a:tc>
+                  <a:txBody>
+                    <a:bodyPr/>
+                    <a:lstStyle/>
+                    <a:p>
+                      <a:pPr lvl="0" indent="0" marL="0">
+                        <a:buNone/>
+                      </a:pPr>
+                      <a:r>
+                        <a:rPr/>
+                        <a:t>Bước xử lý ảnh</a:t>
+                      </a:r>
+                    </a:p>
+                  </a:txBody>
+                  <a:tcPr/>
+                </a:tc>
+                <a:tc>
+                  <a:txBody>
+                    <a:bodyPr/>
+                    <a:lstStyle/>
+                    <a:p>
+                      <a:pPr lvl="0" indent="0" marL="0" algn="r">
+                        <a:buNone/>
+                      </a:pPr>
+                      <a:r>
+                        <a:rPr/>
+                        <a:t>Mua được</a:t>
+                      </a:r>
+                    </a:p>
+                  </a:txBody>
+                  <a:tcPr/>
+                </a:tc>
+                <a:tc>
+                  <a:txBody>
+                    <a:bodyPr/>
+                    <a:lstStyle/>
+                    <a:p>
+                      <a:pPr lvl="0" indent="0" marL="0">
+                        <a:buNone/>
+                      </a:pPr>
+                      <a:r>
+                        <a:rPr/>
+                        <a:t>Giá phải trả</a:t>
+                      </a:r>
+                    </a:p>
+                  </a:txBody>
+                  <a:tcPr/>
+                </a:tc>
+              </a:tr>
+              <a:tr h="0">
+                <a:tc>
+                  <a:txBody>
+                    <a:bodyPr/>
+                    <a:lstStyle/>
+                    <a:p>
+                      <a:pPr lvl="0" indent="0" marL="0">
+                        <a:buNone/>
+                      </a:pPr>
+                      <a:r>
+                        <a:rPr b="1"/>
+                        <a:t>Tách hai nửa + ghép ngang</a:t>
+                      </a:r>
+                    </a:p>
+                  </a:txBody>
+                </a:tc>
+                <a:tc>
+                  <a:txBody>
+                    <a:bodyPr/>
+                    <a:lstStyle/>
+                    <a:p>
+                      <a:pPr lvl="0" indent="0" marL="0" algn="r">
+                        <a:buNone/>
+                      </a:pPr>
+                      <a:r>
+                        <a:rPr b="1"/>
+                        <a:t>+34,92 điểm</a:t>
+                      </a:r>
+                    </a:p>
+                  </a:txBody>
+                </a:tc>
+                <a:tc>
+                  <a:txBody>
+                    <a:bodyPr/>
+                    <a:lstStyle/>
+                    <a:p>
+                      <a:pPr lvl="0" indent="0" marL="0">
+                        <a:buNone/>
+                      </a:pPr>
+                      <a:r>
+                        <a:rPr/>
+                        <a:t>~0 ms</a:t>
+                      </a:r>
+                    </a:p>
+                  </a:txBody>
+                </a:tc>
+              </a:tr>
+              <a:tr h="0">
+                <a:tc>
+                  <a:txBody>
+                    <a:bodyPr/>
+                    <a:lstStyle/>
+                    <a:p>
+                      <a:pPr lvl="0" indent="0" marL="0">
+                        <a:buNone/>
+                      </a:pPr>
+                      <a:r>
+                        <a:rPr b="1"/>
+                        <a:t>Bộ luật hậu xử lý</a:t>
+                      </a:r>
+                    </a:p>
+                  </a:txBody>
+                </a:tc>
+                <a:tc>
+                  <a:txBody>
+                    <a:bodyPr/>
+                    <a:lstStyle/>
+                    <a:p>
+                      <a:pPr lvl="0" indent="0" marL="0" algn="r">
+                        <a:buNone/>
+                      </a:pPr>
+                      <a:r>
+                        <a:rPr b="1"/>
+                        <a:t>+11,39 điểm</a:t>
+                      </a:r>
+                      <a:r>
+                        <a:rPr/>
+                        <a:t> · 319 sửa đúng, </a:t>
+                      </a:r>
+                      <a:r>
+                        <a:rPr b="1"/>
+                        <a:t>0 hỏng</a:t>
+                      </a:r>
+                    </a:p>
+                  </a:txBody>
+                </a:tc>
+                <a:tc>
+                  <a:txBody>
+                    <a:bodyPr/>
+                    <a:lstStyle/>
+                    <a:p>
+                      <a:pPr lvl="0" indent="0" marL="0">
+                        <a:buNone/>
+                      </a:pPr>
+                      <a:r>
+                        <a:rPr/>
+                        <a:t>0,03 ms</a:t>
+                      </a:r>
+                    </a:p>
+                  </a:txBody>
+                </a:tc>
+              </a:tr>
+              <a:tr h="0">
+                <a:tc>
+                  <a:txBody>
+                    <a:bodyPr/>
+                    <a:lstStyle/>
+                    <a:p>
+                      <a:pPr lvl="0" indent="0" marL="0">
+                        <a:buNone/>
+                      </a:pPr>
+                      <a:r>
+                        <a:rPr/>
+                        <a:t>Nắn hình + giãn dọc</a:t>
+                      </a:r>
+                    </a:p>
+                  </a:txBody>
+                </a:tc>
+                <a:tc>
+                  <a:txBody>
+                    <a:bodyPr/>
+                    <a:lstStyle/>
+                    <a:p>
+                      <a:pPr lvl="0" indent="0" marL="0" algn="r">
+                        <a:buNone/>
+                      </a:pPr>
+                      <a:r>
+                        <a:rPr b="1"/>
+                        <a:t>+34 biển</a:t>
+                      </a:r>
+                    </a:p>
+                  </a:txBody>
+                </a:tc>
+                <a:tc>
+                  <a:txBody>
+                    <a:bodyPr/>
+                    <a:lstStyle/>
+                    <a:p>
+                      <a:pPr lvl="0" indent="0" marL="0">
+                        <a:buNone/>
+                      </a:pPr>
+                      <a:r>
+                        <a:rPr/>
+                        <a:t>+244 ms ở p95</a:t>
+                      </a:r>
+                    </a:p>
+                  </a:txBody>
+                </a:tc>
+              </a:tr>
+              <a:tr h="0">
+                <a:tc>
+                  <a:txBody>
+                    <a:bodyPr/>
+                    <a:lstStyle/>
+                    <a:p>
+                      <a:pPr lvl="0" indent="0" marL="0">
+                        <a:buNone/>
+                      </a:pPr>
+                      <a:r>
+                        <a:rPr/>
+                        <a:t>Siêu phân giải — đã </a:t>
+                      </a:r>
+                      <a:r>
+                        <a:rPr b="1"/>
+                        <a:t>tắt</a:t>
+                      </a:r>
+                    </a:p>
+                  </a:txBody>
+                </a:tc>
+                <a:tc>
+                  <a:txBody>
+                    <a:bodyPr/>
+                    <a:lstStyle/>
+                    <a:p>
+                      <a:pPr lvl="0" indent="0" marL="0" algn="r">
+                        <a:buNone/>
+                      </a:pPr>
+                      <a:r>
+                        <a:rPr b="1"/>
+                        <a:t>0 biển</a:t>
+                      </a:r>
+                      <a:r>
+                        <a:rPr/>
+                        <a:t>, nhưng </a:t>
+                      </a:r>
+                      <a:r>
+                        <a:rPr b="1"/>
+                        <a:t>0/120 mẫu lọt cổng</a:t>
+                      </a:r>
+                    </a:p>
+                  </a:txBody>
+                </a:tc>
+                <a:tc>
+                  <a:txBody>
+                    <a:bodyPr/>
+                    <a:lstStyle/>
+                    <a:p>
+                      <a:pPr lvl="0" indent="0" marL="0">
+                        <a:buNone/>
+                      </a:pPr>
+                      <a:r>
+                        <a:rPr/>
+                        <a:t>+319 ms p95</a:t>
+                      </a:r>
+                    </a:p>
+                  </a:txBody>
+                </a:tc>
+              </a:tr>
+              <a:tr h="0">
+                <a:tc>
+                  <a:txBody>
+                    <a:bodyPr/>
+                    <a:lstStyle/>
+                    <a:p>
+                      <a:pPr lvl="0" indent="0" marL="0">
+                        <a:buNone/>
+                      </a:pPr>
+                      <a:r>
+                        <a:rPr i="1"/>
+                        <a:t>Đối chứng:</a:t>
+                      </a:r>
+                      <a:r>
+                        <a:rPr/>
+                        <a:t> tách-ghép trên </a:t>
+                      </a:r>
+                      <a:r>
+                        <a:rPr b="1"/>
+                        <a:t>Tesseract</a:t>
+                      </a:r>
+                    </a:p>
+                  </a:txBody>
+                </a:tc>
+                <a:tc>
+                  <a:txBody>
+                    <a:bodyPr/>
+                    <a:lstStyle/>
+                    <a:p>
+                      <a:pPr lvl="0" indent="0" marL="0" algn="r">
+                        <a:buNone/>
+                      </a:pPr>
+                      <a:r>
+                        <a:rPr b="1"/>
+                        <a:t>+0,03 điểm</a:t>
+                      </a:r>
+                    </a:p>
+                  </a:txBody>
+                </a:tc>
+                <a:tc>
+                  <a:txBody>
+                    <a:bodyPr/>
+                    <a:lstStyle/>
+                    <a:p>
+                      <a:pPr lvl="0" indent="0" marL="0">
+                        <a:buNone/>
+                      </a:pPr>
+                      <a:r>
+                        <a:rPr/>
+                        <a:t>—</a:t>
+                      </a:r>
+                    </a:p>
+                  </a:txBody>
+                </a:tc>
+              </a:tr>
+            </a:tbl>
+          </a:graphicData>
+        </a:graphic>
+      </p:graphicFrame>
+      <p:sp>
+        <p:nvSpPr>
+          <p:cNvPr id="449" name="Google Shape;449;p31"/>
+          <p:cNvSpPr txBox="1"/>
+          <p:nvPr>
+            <p:ph idx="12" type="sldNum"/>
+          </p:nvPr>
+        </p:nvSpPr>
+        <p:spPr>
+          <a:xfrm>
+            <a:off x="58380" y="6508358"/>
+            <a:ext cx="349642" cy="349642"/>
+          </a:xfrm>
+          <a:prstGeom prst="rect">
+            <a:avLst/>
+          </a:prstGeom>
+          <a:noFill/>
+          <a:ln>
+            <a:noFill/>
+          </a:ln>
+        </p:spPr>
+        <p:txBody>
+          <a:bodyPr anchor="ctr" anchorCtr="0" bIns="45700" lIns="91425" rIns="91425" spcFirstLastPara="1" tIns="45700" wrap="square">
+            <a:noAutofit/>
+          </a:bodyPr>
+          <a:lstStyle>
+            <a:lvl1pPr algn="ctr" indent="0" lvl="0" marL="0">
+              <a:spcBef>
+                <a:spcPts val="0"/>
+              </a:spcBef>
+              <a:buNone/>
+              <a:defRPr sz="700">
+                <a:solidFill>
+                  <a:schemeClr val="dk1"/>
+                </a:solidFill>
+                <a:latin typeface="Arial"/>
+                <a:ea typeface="Arial"/>
+                <a:cs typeface="Arial"/>
+                <a:sym typeface="Arial"/>
+              </a:defRPr>
+            </a:lvl1pPr>
+            <a:lvl2pPr algn="ctr" indent="0" lvl="1" marL="0">
+              <a:spcBef>
+                <a:spcPts val="0"/>
+              </a:spcBef>
+              <a:buNone/>
+              <a:defRPr sz="700">
+                <a:solidFill>
+                  <a:schemeClr val="dk1"/>
+                </a:solidFill>
+                <a:latin typeface="Arial"/>
+                <a:ea typeface="Arial"/>
+                <a:cs typeface="Arial"/>
+                <a:sym typeface="Arial"/>
+              </a:defRPr>
+            </a:lvl2pPr>
+            <a:lvl3pPr algn="ctr" indent="0" lvl="2" marL="0">
+              <a:spcBef>
+                <a:spcPts val="0"/>
+              </a:spcBef>
+              <a:buNone/>
+              <a:defRPr sz="700">
+                <a:solidFill>
+                  <a:schemeClr val="dk1"/>
+                </a:solidFill>
+                <a:latin typeface="Arial"/>
+                <a:ea typeface="Arial"/>
+                <a:cs typeface="Arial"/>
+                <a:sym typeface="Arial"/>
+              </a:defRPr>
+            </a:lvl3pPr>
+            <a:lvl4pPr algn="ctr" indent="0" lvl="3" marL="0">
+              <a:spcBef>
+                <a:spcPts val="0"/>
+              </a:spcBef>
+              <a:buNone/>
+              <a:defRPr sz="700">
+                <a:solidFill>
+                  <a:schemeClr val="dk1"/>
+                </a:solidFill>
+                <a:latin typeface="Arial"/>
+                <a:ea typeface="Arial"/>
+                <a:cs typeface="Arial"/>
+                <a:sym typeface="Arial"/>
+              </a:defRPr>
+            </a:lvl4pPr>
+            <a:lvl5pPr algn="ctr" indent="0" lvl="4" marL="0">
+              <a:spcBef>
+                <a:spcPts val="0"/>
+              </a:spcBef>
+              <a:buNone/>
+              <a:defRPr sz="700">
+                <a:solidFill>
+                  <a:schemeClr val="dk1"/>
+                </a:solidFill>
+                <a:latin typeface="Arial"/>
+                <a:ea typeface="Arial"/>
+                <a:cs typeface="Arial"/>
+                <a:sym typeface="Arial"/>
+              </a:defRPr>
+            </a:lvl5pPr>
+            <a:lvl6pPr algn="ctr" indent="0" lvl="5" marL="0">
+              <a:spcBef>
+                <a:spcPts val="0"/>
+              </a:spcBef>
+              <a:buNone/>
+              <a:defRPr sz="700">
+                <a:solidFill>
+                  <a:schemeClr val="dk1"/>
+                </a:solidFill>
+                <a:latin typeface="Arial"/>
+                <a:ea typeface="Arial"/>
+                <a:cs typeface="Arial"/>
+                <a:sym typeface="Arial"/>
+              </a:defRPr>
+            </a:lvl6pPr>
+            <a:lvl7pPr algn="ctr" indent="0" lvl="6" marL="0">
+              <a:spcBef>
+                <a:spcPts val="0"/>
+              </a:spcBef>
+              <a:buNone/>
+              <a:defRPr sz="700">
+                <a:solidFill>
+                  <a:schemeClr val="dk1"/>
+                </a:solidFill>
+                <a:latin typeface="Arial"/>
+                <a:ea typeface="Arial"/>
+                <a:cs typeface="Arial"/>
+                <a:sym typeface="Arial"/>
+              </a:defRPr>
+            </a:lvl7pPr>
+            <a:lvl8pPr algn="ctr" indent="0" lvl="7" marL="0">
+              <a:spcBef>
+                <a:spcPts val="0"/>
+              </a:spcBef>
+              <a:buNone/>
+              <a:defRPr sz="700">
+                <a:solidFill>
+                  <a:schemeClr val="dk1"/>
+                </a:solidFill>
+                <a:latin typeface="Arial"/>
+                <a:ea typeface="Arial"/>
+                <a:cs typeface="Arial"/>
+                <a:sym typeface="Arial"/>
+              </a:defRPr>
+            </a:lvl8pPr>
+            <a:lvl9pPr algn="ctr" indent="0" lvl="8" marL="0">
+              <a:spcBef>
+                <a:spcPts val="0"/>
+              </a:spcBef>
+              <a:buNone/>
+              <a:defRPr sz="700">
+                <a:solidFill>
+                  <a:schemeClr val="dk1"/>
+                </a:solidFill>
+                <a:latin typeface="Arial"/>
+                <a:ea typeface="Arial"/>
+                <a:cs typeface="Arial"/>
+                <a:sym typeface="Arial"/>
+              </a:defRPr>
+            </a:lvl9pPr>
+          </a:lstStyle>
+          <a:p>
+            <a:pPr algn="ctr" indent="0" lvl="0" marL="0" rtl="0">
+              <a:spcBef>
+                <a:spcPts val="0"/>
+              </a:spcBef>
+              <a:spcAft>
+                <a:spcPts val="0"/>
+              </a:spcAft>
+              <a:buNone/>
+            </a:pPr>
+            <a:fld id="{00000000-1234-1234-1234-123412341234}" type="slidenum">
+              <a:rPr lang="en-US"/>
+              <a:t>‹#›</a:t>
+            </a:fld>
+            <a:endParaRPr/>
+          </a:p>
+        </p:txBody>
+      </p:sp>
+    </p:spTree>
+  </p:cSld>
+</p:sld>
+</file>
+
+<file path=ppt/slides/slide13.xml><?xml version="1.0" encoding="utf-8"?>
+<p:sld xmlns:a="http://schemas.openxmlformats.org/drawingml/2006/main" xmlns:r="http://schemas.openxmlformats.org/officeDocument/2006/relationships" xmlns:p="http://schemas.openxmlformats.org/presentationml/2006/main">
+  <p:cSld>
+    <p:spTree>
+      <p:nvGrpSpPr>
         <p:cNvPr id="134" name="Shape 134"/>
         <p:cNvGrpSpPr/>
         <p:nvPr/>
@@ -44266,7 +45468,7 @@
 </p:sld>
 </file>
 
-<file path=ppt/slides/slide11.xml><?xml version="1.0" encoding="utf-8"?>
+<file path=ppt/slides/slide14.xml><?xml version="1.0" encoding="utf-8"?>
 <p:sld xmlns:a="http://schemas.openxmlformats.org/drawingml/2006/main" xmlns:r="http://schemas.openxmlformats.org/officeDocument/2006/relationships" xmlns:p="http://schemas.openxmlformats.org/presentationml/2006/main">
   <p:cSld>
     <p:spTree>
@@ -44313,7 +45515,7 @@
             </a:pPr>
             <a:r>
               <a:rPr/>
-              <a:t>Demo và hướng phát triển</a:t>
+              <a:t>Demo: hệ thống chạy thật</a:t>
             </a:r>
           </a:p>
         </p:txBody>
@@ -44336,7 +45538,7 @@
             </a:pPr>
             <a:r>
               <a:rPr/>
-              <a:t>Hệ thống chạy thật bằng một lệnh </a:t>
+              <a:t>Khởi động bằng một lệnh </a:t>
             </a:r>
             <a:r>
               <a:rPr>
@@ -44359,6 +45561,273 @@
           </a:p>
         </p:txBody>
       </p:sp>
+      <p:pic>
+        <p:nvPicPr>
+          <p:cNvPr descr="figures/fig-demo-ui.png" id="0" name="Picture 1"/>
+          <p:cNvPicPr>
+            <a:picLocks noGrp="1" noChangeAspect="1"/>
+          </p:cNvPicPr>
+          <p:nvPr/>
+        </p:nvPicPr>
+        <p:blipFill>
+          <a:blip r:embed="rId2"/>
+          <a:stretch>
+            <a:fillRect/>
+          </a:stretch>
+        </p:blipFill>
+        <p:spPr bwMode="auto">
+          <a:xfrm>
+            <a:off x="2971800" y="2324100"/>
+            <a:ext cx="6159500" cy="3848100"/>
+          </a:xfrm>
+          <a:prstGeom prst="rect">
+            <a:avLst/>
+          </a:prstGeom>
+          <a:noFill/>
+          <a:ln w="9525">
+            <a:noFill/>
+            <a:headEnd/>
+            <a:tailEnd/>
+          </a:ln>
+        </p:spPr>
+      </p:pic>
+      <p:sp>
+        <p:nvSpPr>
+          <p:cNvPr id="449" name="Google Shape;449;p31"/>
+          <p:cNvSpPr txBox="1"/>
+          <p:nvPr>
+            <p:ph idx="12" type="sldNum"/>
+          </p:nvPr>
+        </p:nvSpPr>
+        <p:spPr>
+          <a:xfrm>
+            <a:off x="58380" y="6508358"/>
+            <a:ext cx="349642" cy="349642"/>
+          </a:xfrm>
+          <a:prstGeom prst="rect">
+            <a:avLst/>
+          </a:prstGeom>
+          <a:noFill/>
+          <a:ln>
+            <a:noFill/>
+          </a:ln>
+        </p:spPr>
+        <p:txBody>
+          <a:bodyPr anchor="ctr" anchorCtr="0" bIns="45700" lIns="91425" rIns="91425" spcFirstLastPara="1" tIns="45700" wrap="square">
+            <a:noAutofit/>
+          </a:bodyPr>
+          <a:lstStyle>
+            <a:lvl1pPr algn="ctr" indent="0" lvl="0" marL="0">
+              <a:spcBef>
+                <a:spcPts val="0"/>
+              </a:spcBef>
+              <a:buNone/>
+              <a:defRPr sz="700">
+                <a:solidFill>
+                  <a:schemeClr val="dk1"/>
+                </a:solidFill>
+                <a:latin typeface="Arial"/>
+                <a:ea typeface="Arial"/>
+                <a:cs typeface="Arial"/>
+                <a:sym typeface="Arial"/>
+              </a:defRPr>
+            </a:lvl1pPr>
+            <a:lvl2pPr algn="ctr" indent="0" lvl="1" marL="0">
+              <a:spcBef>
+                <a:spcPts val="0"/>
+              </a:spcBef>
+              <a:buNone/>
+              <a:defRPr sz="700">
+                <a:solidFill>
+                  <a:schemeClr val="dk1"/>
+                </a:solidFill>
+                <a:latin typeface="Arial"/>
+                <a:ea typeface="Arial"/>
+                <a:cs typeface="Arial"/>
+                <a:sym typeface="Arial"/>
+              </a:defRPr>
+            </a:lvl2pPr>
+            <a:lvl3pPr algn="ctr" indent="0" lvl="2" marL="0">
+              <a:spcBef>
+                <a:spcPts val="0"/>
+              </a:spcBef>
+              <a:buNone/>
+              <a:defRPr sz="700">
+                <a:solidFill>
+                  <a:schemeClr val="dk1"/>
+                </a:solidFill>
+                <a:latin typeface="Arial"/>
+                <a:ea typeface="Arial"/>
+                <a:cs typeface="Arial"/>
+                <a:sym typeface="Arial"/>
+              </a:defRPr>
+            </a:lvl3pPr>
+            <a:lvl4pPr algn="ctr" indent="0" lvl="3" marL="0">
+              <a:spcBef>
+                <a:spcPts val="0"/>
+              </a:spcBef>
+              <a:buNone/>
+              <a:defRPr sz="700">
+                <a:solidFill>
+                  <a:schemeClr val="dk1"/>
+                </a:solidFill>
+                <a:latin typeface="Arial"/>
+                <a:ea typeface="Arial"/>
+                <a:cs typeface="Arial"/>
+                <a:sym typeface="Arial"/>
+              </a:defRPr>
+            </a:lvl4pPr>
+            <a:lvl5pPr algn="ctr" indent="0" lvl="4" marL="0">
+              <a:spcBef>
+                <a:spcPts val="0"/>
+              </a:spcBef>
+              <a:buNone/>
+              <a:defRPr sz="700">
+                <a:solidFill>
+                  <a:schemeClr val="dk1"/>
+                </a:solidFill>
+                <a:latin typeface="Arial"/>
+                <a:ea typeface="Arial"/>
+                <a:cs typeface="Arial"/>
+                <a:sym typeface="Arial"/>
+              </a:defRPr>
+            </a:lvl5pPr>
+            <a:lvl6pPr algn="ctr" indent="0" lvl="5" marL="0">
+              <a:spcBef>
+                <a:spcPts val="0"/>
+              </a:spcBef>
+              <a:buNone/>
+              <a:defRPr sz="700">
+                <a:solidFill>
+                  <a:schemeClr val="dk1"/>
+                </a:solidFill>
+                <a:latin typeface="Arial"/>
+                <a:ea typeface="Arial"/>
+                <a:cs typeface="Arial"/>
+                <a:sym typeface="Arial"/>
+              </a:defRPr>
+            </a:lvl6pPr>
+            <a:lvl7pPr algn="ctr" indent="0" lvl="6" marL="0">
+              <a:spcBef>
+                <a:spcPts val="0"/>
+              </a:spcBef>
+              <a:buNone/>
+              <a:defRPr sz="700">
+                <a:solidFill>
+                  <a:schemeClr val="dk1"/>
+                </a:solidFill>
+                <a:latin typeface="Arial"/>
+                <a:ea typeface="Arial"/>
+                <a:cs typeface="Arial"/>
+                <a:sym typeface="Arial"/>
+              </a:defRPr>
+            </a:lvl7pPr>
+            <a:lvl8pPr algn="ctr" indent="0" lvl="7" marL="0">
+              <a:spcBef>
+                <a:spcPts val="0"/>
+              </a:spcBef>
+              <a:buNone/>
+              <a:defRPr sz="700">
+                <a:solidFill>
+                  <a:schemeClr val="dk1"/>
+                </a:solidFill>
+                <a:latin typeface="Arial"/>
+                <a:ea typeface="Arial"/>
+                <a:cs typeface="Arial"/>
+                <a:sym typeface="Arial"/>
+              </a:defRPr>
+            </a:lvl8pPr>
+            <a:lvl9pPr algn="ctr" indent="0" lvl="8" marL="0">
+              <a:spcBef>
+                <a:spcPts val="0"/>
+              </a:spcBef>
+              <a:buNone/>
+              <a:defRPr sz="700">
+                <a:solidFill>
+                  <a:schemeClr val="dk1"/>
+                </a:solidFill>
+                <a:latin typeface="Arial"/>
+                <a:ea typeface="Arial"/>
+                <a:cs typeface="Arial"/>
+                <a:sym typeface="Arial"/>
+              </a:defRPr>
+            </a:lvl9pPr>
+          </a:lstStyle>
+          <a:p>
+            <a:pPr algn="ctr" indent="0" lvl="0" marL="0" rtl="0">
+              <a:spcBef>
+                <a:spcPts val="0"/>
+              </a:spcBef>
+              <a:spcAft>
+                <a:spcPts val="0"/>
+              </a:spcAft>
+              <a:buNone/>
+            </a:pPr>
+            <a:fld id="{00000000-1234-1234-1234-123412341234}" type="slidenum">
+              <a:rPr lang="en-US"/>
+              <a:t>‹#›</a:t>
+            </a:fld>
+            <a:endParaRPr/>
+          </a:p>
+        </p:txBody>
+      </p:sp>
+    </p:spTree>
+  </p:cSld>
+</p:sld>
+</file>
+
+<file path=ppt/slides/slide15.xml><?xml version="1.0" encoding="utf-8"?>
+<p:sld xmlns:a="http://schemas.openxmlformats.org/drawingml/2006/main" xmlns:r="http://schemas.openxmlformats.org/officeDocument/2006/relationships" xmlns:p="http://schemas.openxmlformats.org/presentationml/2006/main">
+  <p:cSld>
+    <p:spTree>
+      <p:nvGrpSpPr>
+        <p:cNvPr id="134" name="Shape 134"/>
+        <p:cNvGrpSpPr/>
+        <p:nvPr/>
+      </p:nvGrpSpPr>
+      <p:grpSpPr>
+        <a:xfrm>
+          <a:off x="0" y="0"/>
+          <a:ext cx="0" cy="0"/>
+          <a:chOff x="0" y="0"/>
+          <a:chExt cx="0" cy="0"/>
+        </a:xfrm>
+      </p:grpSpPr>
+      <p:sp>
+        <p:nvSpPr>
+          <p:cNvPr id="142" name="Google Shape;142;p23"/>
+          <p:cNvSpPr txBox="1"/>
+          <p:nvPr>
+            <p:ph type="title"/>
+          </p:nvPr>
+        </p:nvSpPr>
+        <p:spPr>
+          <a:xfrm>
+            <a:off x="774145" y="223964"/>
+            <a:ext cx="10579655" cy="785896"/>
+          </a:xfrm>
+          <a:prstGeom prst="rect">
+            <a:avLst/>
+          </a:prstGeom>
+          <a:noFill/>
+          <a:ln>
+            <a:noFill/>
+          </a:ln>
+        </p:spPr>
+        <p:txBody>
+          <a:bodyPr/>
+          <a:lstStyle/>
+          <a:p>
+            <a:pPr lvl="0" indent="0" marL="0">
+              <a:buNone/>
+            </a:pPr>
+            <a:r>
+              <a:rPr/>
+              <a:t>Hướng phát triển</a:t>
+            </a:r>
+          </a:p>
+        </p:txBody>
+      </p:sp>
       <p:graphicFrame>
         <p:nvGraphicFramePr>
           <p:cNvPr id="6" name="Content Placeholder 5"/>
@@ -44370,8 +45839,8 @@
           </p:nvPr>
         </p:nvGraphicFramePr>
         <p:xfrm>
-          <a:off x="762000" y="2324100"/>
-          <a:ext cx="10579100" cy="3848100"/>
+          <a:off x="762000" y="1231900"/>
+          <a:ext cx="10579100" cy="4940300"/>
         </p:xfrm>
         <a:graphic>
           <a:graphicData uri="http://schemas.openxmlformats.org/drawingml/2006/table">
@@ -44636,7 +46105,7 @@
       </p:graphicFrame>
       <p:sp>
         <p:nvSpPr>
-          <p:cNvPr id="449" name="Google Shape;449;p31"/>
+          <p:cNvPr id="155" name="Google Shape;155;p23"/>
           <p:cNvSpPr txBox="1"/>
           <p:nvPr>
             <p:ph idx="12" type="sldNum"/>
@@ -44819,7 +46288,7 @@
 </p:sld>
 </file>
 
-<file path=ppt/slides/slide12.xml><?xml version="1.0" encoding="utf-8"?>
+<file path=ppt/slides/slide16.xml><?xml version="1.0" encoding="utf-8"?>
 <p:sld xmlns:a="http://schemas.openxmlformats.org/drawingml/2006/main" xmlns:r="http://schemas.openxmlformats.org/officeDocument/2006/relationships" xmlns:p="http://schemas.openxmlformats.org/presentationml/2006/main">
   <p:cSld>
     <p:spTree>
@@ -46093,6 +47562,588 @@
   <p:cSld>
     <p:spTree>
       <p:nvGrpSpPr>
+        <p:cNvPr id="428" name="Shape 428"/>
+        <p:cNvGrpSpPr/>
+        <p:nvPr/>
+      </p:nvGrpSpPr>
+      <p:grpSpPr>
+        <a:xfrm>
+          <a:off x="0" y="0"/>
+          <a:ext cx="0" cy="0"/>
+          <a:chOff x="0" y="0"/>
+          <a:chExt cx="0" cy="0"/>
+        </a:xfrm>
+      </p:grpSpPr>
+      <p:sp>
+        <p:nvSpPr>
+          <p:cNvPr id="436" name="Google Shape;436;p31"/>
+          <p:cNvSpPr txBox="1"/>
+          <p:nvPr>
+            <p:ph type="title"/>
+          </p:nvPr>
+        </p:nvSpPr>
+        <p:spPr>
+          <a:xfrm>
+            <a:off x="771525" y="200025"/>
+            <a:ext cx="10582275" cy="790575"/>
+          </a:xfrm>
+          <a:prstGeom prst="rect">
+            <a:avLst/>
+          </a:prstGeom>
+          <a:noFill/>
+          <a:ln>
+            <a:noFill/>
+          </a:ln>
+        </p:spPr>
+        <p:txBody>
+          <a:bodyPr/>
+          <a:lstStyle/>
+          <a:p>
+            <a:pPr lvl="0" indent="0" marL="0">
+              <a:buNone/>
+            </a:pPr>
+            <a:r>
+              <a:rPr/>
+              <a:t>Bộ dữ liệu: khử trùng lặp bằng băm tri giác</a:t>
+            </a:r>
+          </a:p>
+        </p:txBody>
+      </p:sp>
+      <p:sp>
+        <p:nvSpPr>
+          <p:cNvPr id="437" name="Google Shape;437;p31"/>
+          <p:cNvSpPr txBox="1"/>
+          <p:nvPr>
+            <p:ph idx="2" sz="half" type="body"/>
+          </p:nvPr>
+        </p:nvSpPr>
+        <p:spPr/>
+        <p:txBody>
+          <a:bodyPr/>
+          <a:lstStyle/>
+          <a:p>
+            <a:pPr lvl="0" indent="0" marL="0">
+              <a:buNone/>
+            </a:pPr>
+            <a:r>
+              <a:rPr/>
+              <a:t>Các bộ công khai fork lẫn nhau, nên </a:t>
+            </a:r>
+            <a:r>
+              <a:rPr b="1"/>
+              <a:t>44,2% ảnh là bản trùng</a:t>
+            </a:r>
+            <a:r>
+              <a:rPr/>
+              <a:t> — không khử thì đang đo trí nhớ.</a:t>
+            </a:r>
+          </a:p>
+        </p:txBody>
+      </p:sp>
+      <p:graphicFrame>
+        <p:nvGraphicFramePr>
+          <p:cNvPr id="6" name="Content Placeholder 5"/>
+          <p:cNvGraphicFramePr>
+            <a:graphicFrameLocks noGrp="1"/>
+          </p:cNvGraphicFramePr>
+          <p:nvPr>
+            <p:ph idx="1"/>
+          </p:nvPr>
+        </p:nvGraphicFramePr>
+        <p:xfrm>
+          <a:off x="762000" y="2324100"/>
+          <a:ext cx="10579100" cy="3848100"/>
+        </p:xfrm>
+        <a:graphic>
+          <a:graphicData uri="http://schemas.openxmlformats.org/drawingml/2006/table">
+            <a:tbl>
+              <a:tblPr firstRow="1" bandRow="1">
+                <a:tableStyleId>{45BEF19B-5B1D-4A26-B267-ECC71EF7E2D4}</a:tableStyleId>
+              </a:tblPr>
+              <a:tblGrid>
+                <a:gridCol w="5283200"/>
+                <a:gridCol w="5283200"/>
+              </a:tblGrid>
+              <a:tr h="0">
+                <a:tc>
+                  <a:txBody>
+                    <a:bodyPr/>
+                    <a:lstStyle/>
+                    <a:p>
+                      <a:pPr lvl="0" indent="0" marL="0">
+                        <a:buNone/>
+                      </a:pPr>
+                      <a:r>
+                        <a:rPr/>
+                        <a:t>Bước</a:t>
+                      </a:r>
+                    </a:p>
+                  </a:txBody>
+                  <a:tcPr/>
+                </a:tc>
+                <a:tc>
+                  <a:txBody>
+                    <a:bodyPr/>
+                    <a:lstStyle/>
+                    <a:p>
+                      <a:pPr lvl="0" indent="0" marL="0">
+                        <a:buNone/>
+                      </a:pPr>
+                      <a:r>
+                        <a:rPr/>
+                        <a:t>Kết quả</a:t>
+                      </a:r>
+                    </a:p>
+                  </a:txBody>
+                  <a:tcPr/>
+                </a:tc>
+              </a:tr>
+              <a:tr h="0">
+                <a:tc>
+                  <a:txBody>
+                    <a:bodyPr/>
+                    <a:lstStyle/>
+                    <a:p>
+                      <a:pPr lvl="0" indent="0" marL="0">
+                        <a:buNone/>
+                      </a:pPr>
+                      <a:r>
+                        <a:rPr/>
+                        <a:t>Hợp nhất </a:t>
+                      </a:r>
+                      <a:r>
+                        <a:rPr b="1"/>
+                        <a:t>7 bộ công khai</a:t>
+                      </a:r>
+                    </a:p>
+                  </a:txBody>
+                </a:tc>
+                <a:tc>
+                  <a:txBody>
+                    <a:bodyPr/>
+                    <a:lstStyle/>
+                    <a:p>
+                      <a:pPr lvl="0" indent="0" marL="0">
+                        <a:buNone/>
+                      </a:pPr>
+                      <a:r>
+                        <a:rPr/>
+                        <a:t>27.111 ảnh</a:t>
+                      </a:r>
+                    </a:p>
+                  </a:txBody>
+                </a:tc>
+              </a:tr>
+              <a:tr h="0">
+                <a:tc>
+                  <a:txBody>
+                    <a:bodyPr/>
+                    <a:lstStyle/>
+                    <a:p>
+                      <a:pPr lvl="0" indent="0" marL="0">
+                        <a:buNone/>
+                      </a:pPr>
+                      <a:r>
+                        <a:rPr/>
+                        <a:t>Khử trùng lặp chéo bộ, băm tri giác </a:t>
+                      </a:r>
+                      <a:r>
+                        <a:rPr b="1"/>
+                        <a:t>DCT 64 bit</a:t>
+                      </a:r>
+                    </a:p>
+                  </a:txBody>
+                </a:tc>
+                <a:tc>
+                  <a:txBody>
+                    <a:bodyPr/>
+                    <a:lstStyle/>
+                    <a:p>
+                      <a:pPr lvl="0" indent="0" marL="0">
+                        <a:buNone/>
+                      </a:pPr>
+                      <a:r>
+                        <a:rPr/>
+                        <a:t>còn </a:t>
+                      </a:r>
+                      <a:r>
+                        <a:rPr b="1"/>
+                        <a:t>15.133</a:t>
+                      </a:r>
+                      <a:r>
+                        <a:rPr/>
+                        <a:t> ảnh · loại </a:t>
+                      </a:r>
+                      <a:r>
+                        <a:rPr b="1"/>
+                        <a:t>44,2%</a:t>
+                      </a:r>
+                    </a:p>
+                  </a:txBody>
+                </a:tc>
+              </a:tr>
+              <a:tr h="0">
+                <a:tc>
+                  <a:txBody>
+                    <a:bodyPr/>
+                    <a:lstStyle/>
+                    <a:p>
+                      <a:pPr lvl="0" indent="0" marL="0">
+                        <a:buNone/>
+                      </a:pPr>
+                      <a:r>
+                        <a:rPr/>
+                        <a:t>Ca cực đoan</a:t>
+                      </a:r>
+                    </a:p>
+                  </a:txBody>
+                </a:tc>
+                <a:tc>
+                  <a:txBody>
+                    <a:bodyPr/>
+                    <a:lstStyle/>
+                    <a:p>
+                      <a:pPr lvl="0" indent="0" marL="0">
+                        <a:buNone/>
+                      </a:pPr>
+                      <a:r>
+                        <a:rPr/>
+                        <a:t>một bộ vào </a:t>
+                      </a:r>
+                      <a:r>
+                        <a:rPr b="1"/>
+                        <a:t>1.005</a:t>
+                      </a:r>
+                      <a:r>
+                        <a:rPr/>
+                        <a:t> ảnh, ra </a:t>
+                      </a:r>
+                      <a:r>
+                        <a:rPr b="1"/>
+                        <a:t>0</a:t>
+                      </a:r>
+                      <a:r>
+                        <a:rPr/>
+                        <a:t> ảnh</a:t>
+                      </a:r>
+                    </a:p>
+                  </a:txBody>
+                </a:tc>
+              </a:tr>
+              <a:tr h="0">
+                <a:tc>
+                  <a:txBody>
+                    <a:bodyPr/>
+                    <a:lstStyle/>
+                    <a:p>
+                      <a:pPr lvl="0" indent="0" marL="0">
+                        <a:buNone/>
+                      </a:pPr>
+                      <a:r>
+                        <a:rPr/>
+                        <a:t>Băm đa chỉ mục (nguyên lý chuồng bồ câu)</a:t>
+                      </a:r>
+                    </a:p>
+                  </a:txBody>
+                </a:tc>
+                <a:tc>
+                  <a:txBody>
+                    <a:bodyPr/>
+                    <a:lstStyle/>
+                    <a:p>
+                      <a:pPr lvl="0" indent="0" marL="0">
+                        <a:buNone/>
+                      </a:pPr>
+                      <a:r>
+                        <a:rPr/>
+                        <a:t>thuật toán </a:t>
+                      </a:r>
+                      <a:r>
+                        <a:rPr b="1"/>
+                        <a:t>chính xác</a:t>
+                      </a:r>
+                      <a:r>
+                        <a:rPr/>
+                        <a:t>, không xấp xỉ</a:t>
+                      </a:r>
+                    </a:p>
+                  </a:txBody>
+                </a:tc>
+              </a:tr>
+              <a:tr h="0">
+                <a:tc>
+                  <a:txBody>
+                    <a:bodyPr/>
+                    <a:lstStyle/>
+                    <a:p>
+                      <a:pPr lvl="0" indent="0" marL="0">
+                        <a:buNone/>
+                      </a:pPr>
+                      <a:r>
+                        <a:rPr/>
+                        <a:t>Chia tập, giữ nhóm trùng cùng một bên</a:t>
+                      </a:r>
+                    </a:p>
+                  </a:txBody>
+                </a:tc>
+                <a:tc>
+                  <a:txBody>
+                    <a:bodyPr/>
+                    <a:lstStyle/>
+                    <a:p>
+                      <a:pPr lvl="0" indent="0" marL="0">
+                        <a:buNone/>
+                      </a:pPr>
+                      <a:r>
+                        <a:rPr/>
+                        <a:t>10.592 / 3.027 / </a:t>
+                      </a:r>
+                      <a:r>
+                        <a:rPr b="1"/>
+                        <a:t>1.514</a:t>
+                      </a:r>
+                    </a:p>
+                  </a:txBody>
+                </a:tc>
+              </a:tr>
+              <a:tr h="0">
+                <a:tc>
+                  <a:txBody>
+                    <a:bodyPr/>
+                    <a:lstStyle/>
+                    <a:p>
+                      <a:pPr lvl="0" indent="0" marL="0">
+                        <a:buNone/>
+                      </a:pPr>
+                      <a:r>
+                        <a:rPr b="1"/>
+                        <a:t>Giới hạn còn lại</a:t>
+                      </a:r>
+                    </a:p>
+                  </a:txBody>
+                </a:tc>
+                <a:tc>
+                  <a:txBody>
+                    <a:bodyPr/>
+                    <a:lstStyle/>
+                    <a:p>
+                      <a:pPr lvl="0" indent="0" marL="0">
+                        <a:buNone/>
+                      </a:pPr>
+                      <a:r>
+                        <a:rPr/>
+                        <a:t>pHash tóm tắt </a:t>
+                      </a:r>
+                      <a:r>
+                        <a:rPr b="1"/>
+                        <a:t>khung ảnh</a:t>
+                      </a:r>
+                      <a:r>
+                        <a:rPr/>
+                        <a:t>, không tóm tắt </a:t>
+                      </a:r>
+                      <a:r>
+                        <a:rPr b="1"/>
+                        <a:t>chiếc xe</a:t>
+                      </a:r>
+                    </a:p>
+                  </a:txBody>
+                </a:tc>
+              </a:tr>
+            </a:tbl>
+          </a:graphicData>
+        </a:graphic>
+      </p:graphicFrame>
+      <p:sp>
+        <p:nvSpPr>
+          <p:cNvPr id="449" name="Google Shape;449;p31"/>
+          <p:cNvSpPr txBox="1"/>
+          <p:nvPr>
+            <p:ph idx="12" type="sldNum"/>
+          </p:nvPr>
+        </p:nvSpPr>
+        <p:spPr>
+          <a:xfrm>
+            <a:off x="58380" y="6508358"/>
+            <a:ext cx="349642" cy="349642"/>
+          </a:xfrm>
+          <a:prstGeom prst="rect">
+            <a:avLst/>
+          </a:prstGeom>
+          <a:noFill/>
+          <a:ln>
+            <a:noFill/>
+          </a:ln>
+        </p:spPr>
+        <p:txBody>
+          <a:bodyPr anchor="ctr" anchorCtr="0" bIns="45700" lIns="91425" rIns="91425" spcFirstLastPara="1" tIns="45700" wrap="square">
+            <a:noAutofit/>
+          </a:bodyPr>
+          <a:lstStyle>
+            <a:lvl1pPr algn="ctr" indent="0" lvl="0" marL="0">
+              <a:spcBef>
+                <a:spcPts val="0"/>
+              </a:spcBef>
+              <a:buNone/>
+              <a:defRPr sz="700">
+                <a:solidFill>
+                  <a:schemeClr val="dk1"/>
+                </a:solidFill>
+                <a:latin typeface="Arial"/>
+                <a:ea typeface="Arial"/>
+                <a:cs typeface="Arial"/>
+                <a:sym typeface="Arial"/>
+              </a:defRPr>
+            </a:lvl1pPr>
+            <a:lvl2pPr algn="ctr" indent="0" lvl="1" marL="0">
+              <a:spcBef>
+                <a:spcPts val="0"/>
+              </a:spcBef>
+              <a:buNone/>
+              <a:defRPr sz="700">
+                <a:solidFill>
+                  <a:schemeClr val="dk1"/>
+                </a:solidFill>
+                <a:latin typeface="Arial"/>
+                <a:ea typeface="Arial"/>
+                <a:cs typeface="Arial"/>
+                <a:sym typeface="Arial"/>
+              </a:defRPr>
+            </a:lvl2pPr>
+            <a:lvl3pPr algn="ctr" indent="0" lvl="2" marL="0">
+              <a:spcBef>
+                <a:spcPts val="0"/>
+              </a:spcBef>
+              <a:buNone/>
+              <a:defRPr sz="700">
+                <a:solidFill>
+                  <a:schemeClr val="dk1"/>
+                </a:solidFill>
+                <a:latin typeface="Arial"/>
+                <a:ea typeface="Arial"/>
+                <a:cs typeface="Arial"/>
+                <a:sym typeface="Arial"/>
+              </a:defRPr>
+            </a:lvl3pPr>
+            <a:lvl4pPr algn="ctr" indent="0" lvl="3" marL="0">
+              <a:spcBef>
+                <a:spcPts val="0"/>
+              </a:spcBef>
+              <a:buNone/>
+              <a:defRPr sz="700">
+                <a:solidFill>
+                  <a:schemeClr val="dk1"/>
+                </a:solidFill>
+                <a:latin typeface="Arial"/>
+                <a:ea typeface="Arial"/>
+                <a:cs typeface="Arial"/>
+                <a:sym typeface="Arial"/>
+              </a:defRPr>
+            </a:lvl4pPr>
+            <a:lvl5pPr algn="ctr" indent="0" lvl="4" marL="0">
+              <a:spcBef>
+                <a:spcPts val="0"/>
+              </a:spcBef>
+              <a:buNone/>
+              <a:defRPr sz="700">
+                <a:solidFill>
+                  <a:schemeClr val="dk1"/>
+                </a:solidFill>
+                <a:latin typeface="Arial"/>
+                <a:ea typeface="Arial"/>
+                <a:cs typeface="Arial"/>
+                <a:sym typeface="Arial"/>
+              </a:defRPr>
+            </a:lvl5pPr>
+            <a:lvl6pPr algn="ctr" indent="0" lvl="5" marL="0">
+              <a:spcBef>
+                <a:spcPts val="0"/>
+              </a:spcBef>
+              <a:buNone/>
+              <a:defRPr sz="700">
+                <a:solidFill>
+                  <a:schemeClr val="dk1"/>
+                </a:solidFill>
+                <a:latin typeface="Arial"/>
+                <a:ea typeface="Arial"/>
+                <a:cs typeface="Arial"/>
+                <a:sym typeface="Arial"/>
+              </a:defRPr>
+            </a:lvl6pPr>
+            <a:lvl7pPr algn="ctr" indent="0" lvl="6" marL="0">
+              <a:spcBef>
+                <a:spcPts val="0"/>
+              </a:spcBef>
+              <a:buNone/>
+              <a:defRPr sz="700">
+                <a:solidFill>
+                  <a:schemeClr val="dk1"/>
+                </a:solidFill>
+                <a:latin typeface="Arial"/>
+                <a:ea typeface="Arial"/>
+                <a:cs typeface="Arial"/>
+                <a:sym typeface="Arial"/>
+              </a:defRPr>
+            </a:lvl7pPr>
+            <a:lvl8pPr algn="ctr" indent="0" lvl="7" marL="0">
+              <a:spcBef>
+                <a:spcPts val="0"/>
+              </a:spcBef>
+              <a:buNone/>
+              <a:defRPr sz="700">
+                <a:solidFill>
+                  <a:schemeClr val="dk1"/>
+                </a:solidFill>
+                <a:latin typeface="Arial"/>
+                <a:ea typeface="Arial"/>
+                <a:cs typeface="Arial"/>
+                <a:sym typeface="Arial"/>
+              </a:defRPr>
+            </a:lvl8pPr>
+            <a:lvl9pPr algn="ctr" indent="0" lvl="8" marL="0">
+              <a:spcBef>
+                <a:spcPts val="0"/>
+              </a:spcBef>
+              <a:buNone/>
+              <a:defRPr sz="700">
+                <a:solidFill>
+                  <a:schemeClr val="dk1"/>
+                </a:solidFill>
+                <a:latin typeface="Arial"/>
+                <a:ea typeface="Arial"/>
+                <a:cs typeface="Arial"/>
+                <a:sym typeface="Arial"/>
+              </a:defRPr>
+            </a:lvl9pPr>
+          </a:lstStyle>
+          <a:p>
+            <a:pPr algn="ctr" indent="0" lvl="0" marL="0" rtl="0">
+              <a:spcBef>
+                <a:spcPts val="0"/>
+              </a:spcBef>
+              <a:spcAft>
+                <a:spcPts val="0"/>
+              </a:spcAft>
+              <a:buNone/>
+            </a:pPr>
+            <a:fld id="{00000000-1234-1234-1234-123412341234}" type="slidenum">
+              <a:rPr lang="en-US"/>
+              <a:t>‹#›</a:t>
+            </a:fld>
+            <a:endParaRPr/>
+          </a:p>
+        </p:txBody>
+      </p:sp>
+    </p:spTree>
+  </p:cSld>
+</p:sld>
+</file>
+
+<file path=ppt/slides/slide5.xml><?xml version="1.0" encoding="utf-8"?>
+<p:sld xmlns:a="http://schemas.openxmlformats.org/drawingml/2006/main" xmlns:r="http://schemas.openxmlformats.org/officeDocument/2006/relationships" xmlns:p="http://schemas.openxmlformats.org/presentationml/2006/main">
+  <p:cSld>
+    <p:spTree>
+      <p:nvGrpSpPr>
         <p:cNvPr id="134" name="Shape 134"/>
         <p:cNvGrpSpPr/>
         <p:nvPr/>
@@ -46395,7 +48446,7 @@
 </p:sld>
 </file>
 
-<file path=ppt/slides/slide5.xml><?xml version="1.0" encoding="utf-8"?>
+<file path=ppt/slides/slide6.xml><?xml version="1.0" encoding="utf-8"?>
 <p:sld xmlns:a="http://schemas.openxmlformats.org/drawingml/2006/main" xmlns:r="http://schemas.openxmlformats.org/officeDocument/2006/relationships" xmlns:p="http://schemas.openxmlformats.org/presentationml/2006/main">
   <p:cSld>
     <p:spTree>
@@ -47048,7 +49099,7 @@
 </p:sld>
 </file>
 
-<file path=ppt/slides/slide6.xml><?xml version="1.0" encoding="utf-8"?>
+<file path=ppt/slides/slide7.xml><?xml version="1.0" encoding="utf-8"?>
 <p:sld xmlns:a="http://schemas.openxmlformats.org/drawingml/2006/main" xmlns:r="http://schemas.openxmlformats.org/officeDocument/2006/relationships" xmlns:p="http://schemas.openxmlformats.org/presentationml/2006/main">
   <p:cSld>
     <p:spTree>
@@ -47346,7 +49397,7 @@
 </p:sld>
 </file>
 
-<file path=ppt/slides/slide7.xml><?xml version="1.0" encoding="utf-8"?>
+<file path=ppt/slides/slide8.xml><?xml version="1.0" encoding="utf-8"?>
 <p:sld xmlns:a="http://schemas.openxmlformats.org/drawingml/2006/main" xmlns:r="http://schemas.openxmlformats.org/officeDocument/2006/relationships" xmlns:p="http://schemas.openxmlformats.org/presentationml/2006/main">
   <p:cSld>
     <p:spTree>
@@ -47969,7 +50020,7 @@
 </p:sld>
 </file>
 
-<file path=ppt/slides/slide8.xml><?xml version="1.0" encoding="utf-8"?>
+<file path=ppt/slides/slide9.xml><?xml version="1.0" encoding="utf-8"?>
 <p:sld xmlns:a="http://schemas.openxmlformats.org/drawingml/2006/main" xmlns:r="http://schemas.openxmlformats.org/officeDocument/2006/relationships" xmlns:p="http://schemas.openxmlformats.org/presentationml/2006/main">
   <p:cSld>
     <p:spTree>
@@ -48785,616 +50836,6 @@
 </p:sld>
 </file>
 
-<file path=ppt/slides/slide9.xml><?xml version="1.0" encoding="utf-8"?>
-<p:sld xmlns:a="http://schemas.openxmlformats.org/drawingml/2006/main" xmlns:r="http://schemas.openxmlformats.org/officeDocument/2006/relationships" xmlns:p="http://schemas.openxmlformats.org/presentationml/2006/main">
-  <p:cSld>
-    <p:spTree>
-      <p:nvGrpSpPr>
-        <p:cNvPr id="428" name="Shape 428"/>
-        <p:cNvGrpSpPr/>
-        <p:nvPr/>
-      </p:nvGrpSpPr>
-      <p:grpSpPr>
-        <a:xfrm>
-          <a:off x="0" y="0"/>
-          <a:ext cx="0" cy="0"/>
-          <a:chOff x="0" y="0"/>
-          <a:chExt cx="0" cy="0"/>
-        </a:xfrm>
-      </p:grpSpPr>
-      <p:sp>
-        <p:nvSpPr>
-          <p:cNvPr id="436" name="Google Shape;436;p31"/>
-          <p:cNvSpPr txBox="1"/>
-          <p:nvPr>
-            <p:ph type="title"/>
-          </p:nvPr>
-        </p:nvSpPr>
-        <p:spPr>
-          <a:xfrm>
-            <a:off x="771525" y="200025"/>
-            <a:ext cx="10582275" cy="790575"/>
-          </a:xfrm>
-          <a:prstGeom prst="rect">
-            <a:avLst/>
-          </a:prstGeom>
-          <a:noFill/>
-          <a:ln>
-            <a:noFill/>
-          </a:ln>
-        </p:spPr>
-        <p:txBody>
-          <a:bodyPr/>
-          <a:lstStyle/>
-          <a:p>
-            <a:pPr lvl="0" indent="0" marL="0">
-              <a:buNone/>
-            </a:pPr>
-            <a:r>
-              <a:rPr/>
-              <a:t>Bóc tách đóng góp của từng bước</a:t>
-            </a:r>
-          </a:p>
-        </p:txBody>
-      </p:sp>
-      <p:sp>
-        <p:nvSpPr>
-          <p:cNvPr id="437" name="Google Shape;437;p31"/>
-          <p:cNvSpPr txBox="1"/>
-          <p:nvPr>
-            <p:ph idx="2" sz="half" type="body"/>
-          </p:nvPr>
-        </p:nvSpPr>
-        <p:spPr/>
-        <p:txBody>
-          <a:bodyPr/>
-          <a:lstStyle/>
-          <a:p>
-            <a:pPr lvl="0" indent="0" marL="0">
-              <a:buNone/>
-            </a:pPr>
-            <a:r>
-              <a:rPr/>
-              <a:t>Mọi bước bật tắt độc lập, nên đóng góp của từng bước </a:t>
-            </a:r>
-            <a:r>
-              <a:rPr b="1"/>
-              <a:t>đo được riêng</a:t>
-            </a:r>
-            <a:r>
-              <a:rPr/>
-              <a:t> — kể cả khi bằng 0.</a:t>
-            </a:r>
-          </a:p>
-        </p:txBody>
-      </p:sp>
-      <p:graphicFrame>
-        <p:nvGraphicFramePr>
-          <p:cNvPr id="6" name="Content Placeholder 5"/>
-          <p:cNvGraphicFramePr>
-            <a:graphicFrameLocks noGrp="1"/>
-          </p:cNvGraphicFramePr>
-          <p:nvPr>
-            <p:ph idx="1"/>
-          </p:nvPr>
-        </p:nvGraphicFramePr>
-        <p:xfrm>
-          <a:off x="762000" y="2324100"/>
-          <a:ext cx="10579100" cy="3848100"/>
-        </p:xfrm>
-        <a:graphic>
-          <a:graphicData uri="http://schemas.openxmlformats.org/drawingml/2006/table">
-            <a:tbl>
-              <a:tblPr firstRow="1" bandRow="1">
-                <a:tableStyleId>{45BEF19B-5B1D-4A26-B267-ECC71EF7E2D4}</a:tableStyleId>
-              </a:tblPr>
-              <a:tblGrid>
-                <a:gridCol w="3517900"/>
-                <a:gridCol w="3517900"/>
-                <a:gridCol w="3517900"/>
-              </a:tblGrid>
-              <a:tr h="0">
-                <a:tc>
-                  <a:txBody>
-                    <a:bodyPr/>
-                    <a:lstStyle/>
-                    <a:p>
-                      <a:pPr lvl="0" indent="0" marL="0">
-                        <a:buNone/>
-                      </a:pPr>
-                      <a:r>
-                        <a:rPr/>
-                        <a:t>Bước xử lý ảnh</a:t>
-                      </a:r>
-                    </a:p>
-                  </a:txBody>
-                  <a:tcPr/>
-                </a:tc>
-                <a:tc>
-                  <a:txBody>
-                    <a:bodyPr/>
-                    <a:lstStyle/>
-                    <a:p>
-                      <a:pPr lvl="0" indent="0" marL="0" algn="r">
-                        <a:buNone/>
-                      </a:pPr>
-                      <a:r>
-                        <a:rPr/>
-                        <a:t>Mua được</a:t>
-                      </a:r>
-                    </a:p>
-                  </a:txBody>
-                  <a:tcPr/>
-                </a:tc>
-                <a:tc>
-                  <a:txBody>
-                    <a:bodyPr/>
-                    <a:lstStyle/>
-                    <a:p>
-                      <a:pPr lvl="0" indent="0" marL="0">
-                        <a:buNone/>
-                      </a:pPr>
-                      <a:r>
-                        <a:rPr/>
-                        <a:t>Giá phải trả</a:t>
-                      </a:r>
-                    </a:p>
-                  </a:txBody>
-                  <a:tcPr/>
-                </a:tc>
-              </a:tr>
-              <a:tr h="0">
-                <a:tc>
-                  <a:txBody>
-                    <a:bodyPr/>
-                    <a:lstStyle/>
-                    <a:p>
-                      <a:pPr lvl="0" indent="0" marL="0">
-                        <a:buNone/>
-                      </a:pPr>
-                      <a:r>
-                        <a:rPr b="1"/>
-                        <a:t>Tách hai nửa + ghép ngang</a:t>
-                      </a:r>
-                    </a:p>
-                  </a:txBody>
-                </a:tc>
-                <a:tc>
-                  <a:txBody>
-                    <a:bodyPr/>
-                    <a:lstStyle/>
-                    <a:p>
-                      <a:pPr lvl="0" indent="0" marL="0" algn="r">
-                        <a:buNone/>
-                      </a:pPr>
-                      <a:r>
-                        <a:rPr b="1"/>
-                        <a:t>+34,92 điểm</a:t>
-                      </a:r>
-                    </a:p>
-                  </a:txBody>
-                </a:tc>
-                <a:tc>
-                  <a:txBody>
-                    <a:bodyPr/>
-                    <a:lstStyle/>
-                    <a:p>
-                      <a:pPr lvl="0" indent="0" marL="0">
-                        <a:buNone/>
-                      </a:pPr>
-                      <a:r>
-                        <a:rPr/>
-                        <a:t>~0 ms</a:t>
-                      </a:r>
-                    </a:p>
-                  </a:txBody>
-                </a:tc>
-              </a:tr>
-              <a:tr h="0">
-                <a:tc>
-                  <a:txBody>
-                    <a:bodyPr/>
-                    <a:lstStyle/>
-                    <a:p>
-                      <a:pPr lvl="0" indent="0" marL="0">
-                        <a:buNone/>
-                      </a:pPr>
-                      <a:r>
-                        <a:rPr b="1"/>
-                        <a:t>Bộ luật hậu xử lý</a:t>
-                      </a:r>
-                    </a:p>
-                  </a:txBody>
-                </a:tc>
-                <a:tc>
-                  <a:txBody>
-                    <a:bodyPr/>
-                    <a:lstStyle/>
-                    <a:p>
-                      <a:pPr lvl="0" indent="0" marL="0" algn="r">
-                        <a:buNone/>
-                      </a:pPr>
-                      <a:r>
-                        <a:rPr b="1"/>
-                        <a:t>+11,39 điểm</a:t>
-                      </a:r>
-                      <a:r>
-                        <a:rPr/>
-                        <a:t> · 319 sửa đúng, </a:t>
-                      </a:r>
-                      <a:r>
-                        <a:rPr b="1"/>
-                        <a:t>0 hỏng</a:t>
-                      </a:r>
-                    </a:p>
-                  </a:txBody>
-                </a:tc>
-                <a:tc>
-                  <a:txBody>
-                    <a:bodyPr/>
-                    <a:lstStyle/>
-                    <a:p>
-                      <a:pPr lvl="0" indent="0" marL="0">
-                        <a:buNone/>
-                      </a:pPr>
-                      <a:r>
-                        <a:rPr/>
-                        <a:t>0,03 ms</a:t>
-                      </a:r>
-                    </a:p>
-                  </a:txBody>
-                </a:tc>
-              </a:tr>
-              <a:tr h="0">
-                <a:tc>
-                  <a:txBody>
-                    <a:bodyPr/>
-                    <a:lstStyle/>
-                    <a:p>
-                      <a:pPr lvl="0" indent="0" marL="0">
-                        <a:buNone/>
-                      </a:pPr>
-                      <a:r>
-                        <a:rPr/>
-                        <a:t>Nắn hình + giãn dọc</a:t>
-                      </a:r>
-                    </a:p>
-                  </a:txBody>
-                </a:tc>
-                <a:tc>
-                  <a:txBody>
-                    <a:bodyPr/>
-                    <a:lstStyle/>
-                    <a:p>
-                      <a:pPr lvl="0" indent="0" marL="0" algn="r">
-                        <a:buNone/>
-                      </a:pPr>
-                      <a:r>
-                        <a:rPr b="1"/>
-                        <a:t>+34 biển</a:t>
-                      </a:r>
-                    </a:p>
-                  </a:txBody>
-                </a:tc>
-                <a:tc>
-                  <a:txBody>
-                    <a:bodyPr/>
-                    <a:lstStyle/>
-                    <a:p>
-                      <a:pPr lvl="0" indent="0" marL="0">
-                        <a:buNone/>
-                      </a:pPr>
-                      <a:r>
-                        <a:rPr/>
-                        <a:t>+244 ms ở p95</a:t>
-                      </a:r>
-                    </a:p>
-                  </a:txBody>
-                </a:tc>
-              </a:tr>
-              <a:tr h="0">
-                <a:tc>
-                  <a:txBody>
-                    <a:bodyPr/>
-                    <a:lstStyle/>
-                    <a:p>
-                      <a:pPr lvl="0" indent="0" marL="0">
-                        <a:buNone/>
-                      </a:pPr>
-                      <a:r>
-                        <a:rPr/>
-                        <a:t>Siêu phân giải — đã </a:t>
-                      </a:r>
-                      <a:r>
-                        <a:rPr b="1"/>
-                        <a:t>tắt</a:t>
-                      </a:r>
-                    </a:p>
-                  </a:txBody>
-                </a:tc>
-                <a:tc>
-                  <a:txBody>
-                    <a:bodyPr/>
-                    <a:lstStyle/>
-                    <a:p>
-                      <a:pPr lvl="0" indent="0" marL="0" algn="r">
-                        <a:buNone/>
-                      </a:pPr>
-                      <a:r>
-                        <a:rPr b="1"/>
-                        <a:t>0 biển</a:t>
-                      </a:r>
-                      <a:r>
-                        <a:rPr/>
-                        <a:t>, nhưng </a:t>
-                      </a:r>
-                      <a:r>
-                        <a:rPr b="1"/>
-                        <a:t>0/120 mẫu lọt cổng</a:t>
-                      </a:r>
-                    </a:p>
-                  </a:txBody>
-                </a:tc>
-                <a:tc>
-                  <a:txBody>
-                    <a:bodyPr/>
-                    <a:lstStyle/>
-                    <a:p>
-                      <a:pPr lvl="0" indent="0" marL="0">
-                        <a:buNone/>
-                      </a:pPr>
-                      <a:r>
-                        <a:rPr/>
-                        <a:t>+319 ms p95</a:t>
-                      </a:r>
-                    </a:p>
-                  </a:txBody>
-                </a:tc>
-              </a:tr>
-              <a:tr h="0">
-                <a:tc>
-                  <a:txBody>
-                    <a:bodyPr/>
-                    <a:lstStyle/>
-                    <a:p>
-                      <a:pPr lvl="0" indent="0" marL="0">
-                        <a:buNone/>
-                      </a:pPr>
-                      <a:r>
-                        <a:rPr i="1"/>
-                        <a:t>Đối chứng:</a:t>
-                      </a:r>
-                      <a:r>
-                        <a:rPr/>
-                        <a:t> tách-ghép trên </a:t>
-                      </a:r>
-                      <a:r>
-                        <a:rPr b="1"/>
-                        <a:t>Tesseract</a:t>
-                      </a:r>
-                    </a:p>
-                  </a:txBody>
-                </a:tc>
-                <a:tc>
-                  <a:txBody>
-                    <a:bodyPr/>
-                    <a:lstStyle/>
-                    <a:p>
-                      <a:pPr lvl="0" indent="0" marL="0" algn="r">
-                        <a:buNone/>
-                      </a:pPr>
-                      <a:r>
-                        <a:rPr b="1"/>
-                        <a:t>+0,03 điểm</a:t>
-                      </a:r>
-                    </a:p>
-                  </a:txBody>
-                </a:tc>
-                <a:tc>
-                  <a:txBody>
-                    <a:bodyPr/>
-                    <a:lstStyle/>
-                    <a:p>
-                      <a:pPr lvl="0" indent="0" marL="0">
-                        <a:buNone/>
-                      </a:pPr>
-                      <a:r>
-                        <a:rPr/>
-                        <a:t>—</a:t>
-                      </a:r>
-                    </a:p>
-                  </a:txBody>
-                </a:tc>
-              </a:tr>
-            </a:tbl>
-          </a:graphicData>
-        </a:graphic>
-      </p:graphicFrame>
-      <p:sp>
-        <p:nvSpPr>
-          <p:cNvPr id="449" name="Google Shape;449;p31"/>
-          <p:cNvSpPr txBox="1"/>
-          <p:nvPr>
-            <p:ph idx="12" type="sldNum"/>
-          </p:nvPr>
-        </p:nvSpPr>
-        <p:spPr>
-          <a:xfrm>
-            <a:off x="58380" y="6508358"/>
-            <a:ext cx="349642" cy="349642"/>
-          </a:xfrm>
-          <a:prstGeom prst="rect">
-            <a:avLst/>
-          </a:prstGeom>
-          <a:noFill/>
-          <a:ln>
-            <a:noFill/>
-          </a:ln>
-        </p:spPr>
-        <p:txBody>
-          <a:bodyPr anchor="ctr" anchorCtr="0" bIns="45700" lIns="91425" rIns="91425" spcFirstLastPara="1" tIns="45700" wrap="square">
-            <a:noAutofit/>
-          </a:bodyPr>
-          <a:lstStyle>
-            <a:lvl1pPr algn="ctr" indent="0" lvl="0" marL="0">
-              <a:spcBef>
-                <a:spcPts val="0"/>
-              </a:spcBef>
-              <a:buNone/>
-              <a:defRPr sz="700">
-                <a:solidFill>
-                  <a:schemeClr val="dk1"/>
-                </a:solidFill>
-                <a:latin typeface="Arial"/>
-                <a:ea typeface="Arial"/>
-                <a:cs typeface="Arial"/>
-                <a:sym typeface="Arial"/>
-              </a:defRPr>
-            </a:lvl1pPr>
-            <a:lvl2pPr algn="ctr" indent="0" lvl="1" marL="0">
-              <a:spcBef>
-                <a:spcPts val="0"/>
-              </a:spcBef>
-              <a:buNone/>
-              <a:defRPr sz="700">
-                <a:solidFill>
-                  <a:schemeClr val="dk1"/>
-                </a:solidFill>
-                <a:latin typeface="Arial"/>
-                <a:ea typeface="Arial"/>
-                <a:cs typeface="Arial"/>
-                <a:sym typeface="Arial"/>
-              </a:defRPr>
-            </a:lvl2pPr>
-            <a:lvl3pPr algn="ctr" indent="0" lvl="2" marL="0">
-              <a:spcBef>
-                <a:spcPts val="0"/>
-              </a:spcBef>
-              <a:buNone/>
-              <a:defRPr sz="700">
-                <a:solidFill>
-                  <a:schemeClr val="dk1"/>
-                </a:solidFill>
-                <a:latin typeface="Arial"/>
-                <a:ea typeface="Arial"/>
-                <a:cs typeface="Arial"/>
-                <a:sym typeface="Arial"/>
-              </a:defRPr>
-            </a:lvl3pPr>
-            <a:lvl4pPr algn="ctr" indent="0" lvl="3" marL="0">
-              <a:spcBef>
-                <a:spcPts val="0"/>
-              </a:spcBef>
-              <a:buNone/>
-              <a:defRPr sz="700">
-                <a:solidFill>
-                  <a:schemeClr val="dk1"/>
-                </a:solidFill>
-                <a:latin typeface="Arial"/>
-                <a:ea typeface="Arial"/>
-                <a:cs typeface="Arial"/>
-                <a:sym typeface="Arial"/>
-              </a:defRPr>
-            </a:lvl4pPr>
-            <a:lvl5pPr algn="ctr" indent="0" lvl="4" marL="0">
-              <a:spcBef>
-                <a:spcPts val="0"/>
-              </a:spcBef>
-              <a:buNone/>
-              <a:defRPr sz="700">
-                <a:solidFill>
-                  <a:schemeClr val="dk1"/>
-                </a:solidFill>
-                <a:latin typeface="Arial"/>
-                <a:ea typeface="Arial"/>
-                <a:cs typeface="Arial"/>
-                <a:sym typeface="Arial"/>
-              </a:defRPr>
-            </a:lvl5pPr>
-            <a:lvl6pPr algn="ctr" indent="0" lvl="5" marL="0">
-              <a:spcBef>
-                <a:spcPts val="0"/>
-              </a:spcBef>
-              <a:buNone/>
-              <a:defRPr sz="700">
-                <a:solidFill>
-                  <a:schemeClr val="dk1"/>
-                </a:solidFill>
-                <a:latin typeface="Arial"/>
-                <a:ea typeface="Arial"/>
-                <a:cs typeface="Arial"/>
-                <a:sym typeface="Arial"/>
-              </a:defRPr>
-            </a:lvl6pPr>
-            <a:lvl7pPr algn="ctr" indent="0" lvl="6" marL="0">
-              <a:spcBef>
-                <a:spcPts val="0"/>
-              </a:spcBef>
-              <a:buNone/>
-              <a:defRPr sz="700">
-                <a:solidFill>
-                  <a:schemeClr val="dk1"/>
-                </a:solidFill>
-                <a:latin typeface="Arial"/>
-                <a:ea typeface="Arial"/>
-                <a:cs typeface="Arial"/>
-                <a:sym typeface="Arial"/>
-              </a:defRPr>
-            </a:lvl7pPr>
-            <a:lvl8pPr algn="ctr" indent="0" lvl="7" marL="0">
-              <a:spcBef>
-                <a:spcPts val="0"/>
-              </a:spcBef>
-              <a:buNone/>
-              <a:defRPr sz="700">
-                <a:solidFill>
-                  <a:schemeClr val="dk1"/>
-                </a:solidFill>
-                <a:latin typeface="Arial"/>
-                <a:ea typeface="Arial"/>
-                <a:cs typeface="Arial"/>
-                <a:sym typeface="Arial"/>
-              </a:defRPr>
-            </a:lvl8pPr>
-            <a:lvl9pPr algn="ctr" indent="0" lvl="8" marL="0">
-              <a:spcBef>
-                <a:spcPts val="0"/>
-              </a:spcBef>
-              <a:buNone/>
-              <a:defRPr sz="700">
-                <a:solidFill>
-                  <a:schemeClr val="dk1"/>
-                </a:solidFill>
-                <a:latin typeface="Arial"/>
-                <a:ea typeface="Arial"/>
-                <a:cs typeface="Arial"/>
-                <a:sym typeface="Arial"/>
-              </a:defRPr>
-            </a:lvl9pPr>
-          </a:lstStyle>
-          <a:p>
-            <a:pPr algn="ctr" indent="0" lvl="0" marL="0" rtl="0">
-              <a:spcBef>
-                <a:spcPts val="0"/>
-              </a:spcBef>
-              <a:spcAft>
-                <a:spcPts val="0"/>
-              </a:spcAft>
-              <a:buNone/>
-            </a:pPr>
-            <a:fld id="{00000000-1234-1234-1234-123412341234}" type="slidenum">
-              <a:rPr lang="en-US"/>
-              <a:t>‹#›</a:t>
-            </a:fld>
-            <a:endParaRPr/>
-          </a:p>
-        </p:txBody>
-      </p:sp>
-    </p:spTree>
-  </p:cSld>
-</p:sld>
-</file>
-
 <file path=ppt/theme/theme1.xml><?xml version="1.0" encoding="utf-8"?>
 <a:theme xmlns:a="http://schemas.openxmlformats.org/drawingml/2006/main" xmlns:r="http://schemas.openxmlformats.org/officeDocument/2006/relationships" name="Office Theme">
   <a:themeElements>

--- a/docs/slides/12-slides-mon-hoc.pptx
+++ b/docs/slides/12-slides-mon-hoc.pptx
@@ -46417,7 +46417,7 @@
             <a:pPr lvl="0"/>
             <a:r>
               <a:rPr/>
-              <a:t>Nói thẳng phần chưa đạt: đọc đúng cả chuỗi </a:t>
+              <a:t>Phần chưa đạt: đọc đúng cả chuỗi </a:t>
             </a:r>
             <a:r>
               <a:rPr b="1"/>
@@ -46425,7 +46425,7 @@
             </a:r>
             <a:r>
               <a:rPr/>
-              <a:t> so với ngưỡng 0,85, và khoảng cách nằm trọn ở biển hai dòng</a:t>
+              <a:t> so với ngưỡng 0,85, khoảng cách nằm trọn ở biển hai dòng</a:t>
             </a:r>
           </a:p>
           <a:p>

--- a/docs/slides/12-slides-mon-hoc.pptx
+++ b/docs/slides/12-slides-mon-hoc.pptx
@@ -43963,7 +43963,7 @@
   <p:cSld>
     <p:spTree>
       <p:nvGrpSpPr>
-        <p:cNvPr id="428" name="Shape 428"/>
+        <p:cNvPr id="134" name="Shape 134"/>
         <p:cNvGrpSpPr/>
         <p:nvPr/>
       </p:nvGrpSpPr>
@@ -43977,7 +43977,7 @@
       </p:grpSpPr>
       <p:sp>
         <p:nvSpPr>
-          <p:cNvPr id="436" name="Google Shape;436;p31"/>
+          <p:cNvPr id="142" name="Google Shape;142;p23"/>
           <p:cNvSpPr txBox="1"/>
           <p:nvPr>
             <p:ph type="title"/>
@@ -43985,8 +43985,8 @@
         </p:nvSpPr>
         <p:spPr>
           <a:xfrm>
-            <a:off x="771525" y="200025"/>
-            <a:ext cx="10582275" cy="790575"/>
+            <a:off x="774145" y="223964"/>
+            <a:ext cx="10579655" cy="785896"/>
           </a:xfrm>
           <a:prstGeom prst="rect">
             <a:avLst/>
@@ -44012,10 +44012,10 @@
       </p:sp>
       <p:sp>
         <p:nvSpPr>
-          <p:cNvPr id="437" name="Google Shape;437;p31"/>
+          <p:cNvPr id="143" name="Google Shape;143;p23"/>
           <p:cNvSpPr txBox="1"/>
           <p:nvPr>
-            <p:ph idx="2" sz="half" type="body"/>
+            <p:ph idx="1"/>
           </p:nvPr>
         </p:nvSpPr>
         <p:spPr/>
@@ -44031,41 +44031,20 @@
               <a:t>Đo mức ký tự thì hai bố cục gần bằng nhau; đo cả chuỗi thì cách một trời một vực.</a:t>
             </a:r>
           </a:p>
+          <a:p>
+            <a:pPr lvl="0" indent="0" marL="0">
+              <a:buNone/>
+            </a:pPr>
+            <a:r>
+              <a:rPr/>
+              <a:t>![](figures/fig-ch4-bố cục.png)</a:t>
+            </a:r>
+          </a:p>
         </p:txBody>
       </p:sp>
-      <p:pic>
-        <p:nvPicPr>
-          <p:cNvPr descr="figures/fig-ch4-layout.png" id="0" name="Picture 1"/>
-          <p:cNvPicPr>
-            <a:picLocks noGrp="1" noChangeAspect="1"/>
-          </p:cNvPicPr>
-          <p:nvPr/>
-        </p:nvPicPr>
-        <p:blipFill>
-          <a:blip r:embed="rId2"/>
-          <a:stretch>
-            <a:fillRect/>
-          </a:stretch>
-        </p:blipFill>
-        <p:spPr bwMode="auto">
-          <a:xfrm>
-            <a:off x="2489200" y="2324100"/>
-            <a:ext cx="7112000" cy="3848100"/>
-          </a:xfrm>
-          <a:prstGeom prst="rect">
-            <a:avLst/>
-          </a:prstGeom>
-          <a:noFill/>
-          <a:ln w="9525">
-            <a:noFill/>
-            <a:headEnd/>
-            <a:tailEnd/>
-          </a:ln>
-        </p:spPr>
-      </p:pic>
       <p:sp>
         <p:nvSpPr>
-          <p:cNvPr id="449" name="Google Shape;449;p31"/>
+          <p:cNvPr id="155" name="Google Shape;155;p23"/>
           <p:cNvSpPr txBox="1"/>
           <p:nvPr>
             <p:ph idx="12" type="sldNum"/>
@@ -44681,7 +44660,7 @@
                       </a:pPr>
                       <a:r>
                         <a:rPr/>
-                        <a:t>Mua được</a:t>
+                        <a:t>cải thiện được</a:t>
                       </a:r>
                     </a:p>
                   </a:txBody>
@@ -45203,7 +45182,7 @@
             </a:pPr>
             <a:r>
               <a:rPr/>
-              <a:t>Ba kết quả trái kỳ vọng</a:t>
+              <a:t>Ba kết quả khác với dự đoán ban đầu</a:t>
             </a:r>
           </a:p>
         </p:txBody>
@@ -45224,7 +45203,7 @@
             <a:pPr lvl="0"/>
             <a:r>
               <a:rPr b="1"/>
-              <a:t>Tách-ghép không độc lập engine</a:t>
+              <a:t>Tách-ghép không độc lập bộ nhận dạng</a:t>
             </a:r>
             <a:r>
               <a:rPr/>
@@ -45270,7 +45249,7 @@
             <a:pPr lvl="0"/>
             <a:r>
               <a:rPr b="1"/>
-              <a:t>Siêu phân giải mua 0 biển, nhưng 0/120 mẫu lọt cổng</a:t>
+              <a:t>Siêu phân giải cải thiện 0 biển, nhưng 0/120 mẫu lọt cổng</a:t>
             </a:r>
             <a:r>
               <a:rPr/>
@@ -45944,7 +45923,7 @@
                       </a:pPr>
                       <a:r>
                         <a:rPr/>
-                        <a:t>Nút thắt lớn nhất — biển hai dòng</a:t>
+                        <a:t>điểm nghẽn lớn nhất — biển hai dòng</a:t>
                       </a:r>
                     </a:p>
                   </a:txBody>
@@ -46356,7 +46335,7 @@
             <a:pPr lvl="0"/>
             <a:r>
               <a:rPr/>
-              <a:t>Chạy đầu-cuối trên máy </a:t>
+              <a:t>Chạy đầu cuối trên máy </a:t>
             </a:r>
             <a:r>
               <a:rPr b="1"/>
@@ -46383,7 +46362,7 @@
             </a:r>
             <a:r>
               <a:rPr/>
-              <a:t>, không bằng mô hình mạnh hơn — mua </a:t>
+              <a:t>, không bằng mô hình mạnh hơn — đóng góp </a:t>
             </a:r>
             <a:r>
               <a:rPr b="1"/>
@@ -47025,7 +47004,7 @@
             </a:pPr>
             <a:r>
               <a:rPr/>
-              <a:t>Hệ thống chạy đầu-cuối, </a:t>
+              <a:t>Hệ thống chạy đầu cuối, </a:t>
             </a:r>
             <a:r>
               <a:rPr b="1"/>
@@ -49104,7 +49083,7 @@
   <p:cSld>
     <p:spTree>
       <p:nvGrpSpPr>
-        <p:cNvPr id="428" name="Shape 428"/>
+        <p:cNvPr id="134" name="Shape 134"/>
         <p:cNvGrpSpPr/>
         <p:nvPr/>
       </p:nvGrpSpPr>
@@ -49118,7 +49097,7 @@
       </p:grpSpPr>
       <p:sp>
         <p:nvSpPr>
-          <p:cNvPr id="436" name="Google Shape;436;p31"/>
+          <p:cNvPr id="142" name="Google Shape;142;p23"/>
           <p:cNvSpPr txBox="1"/>
           <p:nvPr>
             <p:ph type="title"/>
@@ -49126,8 +49105,8 @@
         </p:nvSpPr>
         <p:spPr>
           <a:xfrm>
-            <a:off x="771525" y="200025"/>
-            <a:ext cx="10582275" cy="790575"/>
+            <a:off x="774145" y="223964"/>
+            <a:ext cx="10579655" cy="785896"/>
           </a:xfrm>
           <a:prstGeom prst="rect">
             <a:avLst/>
@@ -49153,10 +49132,10 @@
       </p:sp>
       <p:sp>
         <p:nvSpPr>
-          <p:cNvPr id="437" name="Google Shape;437;p31"/>
+          <p:cNvPr id="143" name="Google Shape;143;p23"/>
           <p:cNvSpPr txBox="1"/>
           <p:nvPr>
-            <p:ph idx="2" sz="half" type="body"/>
+            <p:ph idx="1"/>
           </p:nvPr>
         </p:nvSpPr>
         <p:spPr/>
@@ -49180,41 +49159,20 @@
               <a:t>.</a:t>
             </a:r>
           </a:p>
+          <a:p>
+            <a:pPr lvl="0" indent="0" marL="0">
+              <a:buNone/>
+            </a:pPr>
+            <a:r>
+              <a:rPr/>
+              <a:t>![](figures/fig-đường ống-strip-ngang.png)</a:t>
+            </a:r>
+          </a:p>
         </p:txBody>
       </p:sp>
-      <p:pic>
-        <p:nvPicPr>
-          <p:cNvPr descr="figures/fig-pipeline-strip-ngang.png" id="0" name="Picture 1"/>
-          <p:cNvPicPr>
-            <a:picLocks noGrp="1" noChangeAspect="1"/>
-          </p:cNvPicPr>
-          <p:nvPr/>
-        </p:nvPicPr>
-        <p:blipFill>
-          <a:blip r:embed="rId2"/>
-          <a:stretch>
-            <a:fillRect/>
-          </a:stretch>
-        </p:blipFill>
-        <p:spPr bwMode="auto">
-          <a:xfrm>
-            <a:off x="3911600" y="2324100"/>
-            <a:ext cx="4292600" cy="3848100"/>
-          </a:xfrm>
-          <a:prstGeom prst="rect">
-            <a:avLst/>
-          </a:prstGeom>
-          <a:noFill/>
-          <a:ln w="9525">
-            <a:noFill/>
-            <a:headEnd/>
-            <a:tailEnd/>
-          </a:ln>
-        </p:spPr>
-      </p:pic>
       <p:sp>
         <p:nvSpPr>
-          <p:cNvPr id="449" name="Google Shape;449;p31"/>
+          <p:cNvPr id="155" name="Google Shape;155;p23"/>
           <p:cNvSpPr txBox="1"/>
           <p:nvPr>
             <p:ph idx="12" type="sldNum"/>

--- a/docs/slides/12-slides-mon-hoc.pptx
+++ b/docs/slides/12-slides-mon-hoc.pptx
@@ -44756,11 +44756,11 @@
                       </a:pPr>
                       <a:r>
                         <a:rPr b="1"/>
-                        <a:t>+11,39 điểm</a:t>
+                        <a:t>+13,28 điểm</a:t>
                       </a:r>
                       <a:r>
                         <a:rPr/>
-                        <a:t> · 319 sửa đúng, </a:t>
+                        <a:t> · 372 sửa đúng, </a:t>
                       </a:r>
                       <a:r>
                         <a:rPr b="1"/>
@@ -46377,7 +46377,7 @@
             </a:r>
             <a:r>
               <a:rPr b="1"/>
-              <a:t>+11,39 điểm</a:t>
+              <a:t>+13,28 điểm</a:t>
             </a:r>
             <a:r>
               <a:rPr/>
@@ -46400,7 +46400,7 @@
             </a:r>
             <a:r>
               <a:rPr b="1"/>
-              <a:t>0,7512</a:t>
+              <a:t>0,7701</a:t>
             </a:r>
             <a:r>
               <a:rPr/>
@@ -50309,7 +50309,7 @@
                       </a:pPr>
                       <a:r>
                         <a:rPr b="1"/>
-                        <a:t>0,9454</a:t>
+                        <a:t>0,9483</a:t>
                       </a:r>
                     </a:p>
                   </a:txBody>
@@ -50371,7 +50371,7 @@
                       </a:pPr>
                       <a:r>
                         <a:rPr b="1"/>
-                        <a:t>0,7512</a:t>
+                        <a:t>0,7701</a:t>
                       </a:r>
                     </a:p>
                   </a:txBody>
@@ -50503,7 +50503,7 @@
                       </a:pPr>
                       <a:r>
                         <a:rPr b="1"/>
-                        <a:t>0,6996</a:t>
+                        <a:t>0,7234</a:t>
                       </a:r>
                     </a:p>
                   </a:txBody>

--- a/docs/slides/12-slides-mon-hoc.pptx
+++ b/docs/slides/12-slides-mon-hoc.pptx
@@ -45226,23 +45226,27 @@
             </a:r>
             <a:r>
               <a:rPr/>
-              <a:t> nhầm phổ biến nhất — trực giác không gợi ra </a:t>
+              <a:t> — và một trong hai suy </a:t>
             </a:r>
             <a:r>
-              <a:rPr>
-                <a:latin typeface="Courier"/>
-              </a:rPr>
-              <a:t>E → F</a:t>
+              <a:rPr b="1"/>
+              <a:t>sai chiều</a:t>
             </a:r>
             <a:r>
               <a:rPr/>
-              <a:t> hay </a:t>
+              <a:t>. Thay bằng bảng trích từ ma trận đo được: phủ </a:t>
             </a:r>
             <a:r>
-              <a:rPr>
-                <a:latin typeface="Courier"/>
-              </a:rPr>
-              <a:t>4 → L</a:t>
+              <a:rPr b="1"/>
+              <a:t>4/10</a:t>
+            </a:r>
+            <a:r>
+              <a:rPr/>
+              <a:t>, thêm </a:t>
+            </a:r>
+            <a:r>
+              <a:rPr b="1"/>
+              <a:t>53 biển đúng, 0 hỏng</a:t>
             </a:r>
           </a:p>
           <a:p>

--- a/docs/slides/12-slides-mon-hoc.pptx
+++ b/docs/slides/12-slides-mon-hoc.pptx
@@ -43963,7 +43963,7 @@
   <p:cSld>
     <p:spTree>
       <p:nvGrpSpPr>
-        <p:cNvPr id="134" name="Shape 134"/>
+        <p:cNvPr id="428" name="Shape 428"/>
         <p:cNvGrpSpPr/>
         <p:nvPr/>
       </p:nvGrpSpPr>
@@ -43977,7 +43977,7 @@
       </p:grpSpPr>
       <p:sp>
         <p:nvSpPr>
-          <p:cNvPr id="142" name="Google Shape;142;p23"/>
+          <p:cNvPr id="436" name="Google Shape;436;p31"/>
           <p:cNvSpPr txBox="1"/>
           <p:nvPr>
             <p:ph type="title"/>
@@ -43985,8 +43985,8 @@
         </p:nvSpPr>
         <p:spPr>
           <a:xfrm>
-            <a:off x="774145" y="223964"/>
-            <a:ext cx="10579655" cy="785896"/>
+            <a:off x="771525" y="200025"/>
+            <a:ext cx="10582275" cy="790575"/>
           </a:xfrm>
           <a:prstGeom prst="rect">
             <a:avLst/>
@@ -44012,10 +44012,10 @@
       </p:sp>
       <p:sp>
         <p:nvSpPr>
-          <p:cNvPr id="143" name="Google Shape;143;p23"/>
+          <p:cNvPr id="437" name="Google Shape;437;p31"/>
           <p:cNvSpPr txBox="1"/>
           <p:nvPr>
-            <p:ph idx="1"/>
+            <p:ph idx="2" sz="half" type="body"/>
           </p:nvPr>
         </p:nvSpPr>
         <p:spPr/>
@@ -44031,20 +44031,41 @@
               <a:t>Đo mức ký tự thì hai bố cục gần bằng nhau; đo cả chuỗi thì cách một trời một vực.</a:t>
             </a:r>
           </a:p>
-          <a:p>
-            <a:pPr lvl="0" indent="0" marL="0">
-              <a:buNone/>
-            </a:pPr>
-            <a:r>
-              <a:rPr/>
-              <a:t>![](figures/fig-ch4-bố cục.png)</a:t>
-            </a:r>
-          </a:p>
         </p:txBody>
       </p:sp>
+      <p:pic>
+        <p:nvPicPr>
+          <p:cNvPr descr="figures/fig-ch4-layout.png" id="0" name="Picture 1"/>
+          <p:cNvPicPr>
+            <a:picLocks noGrp="1" noChangeAspect="1"/>
+          </p:cNvPicPr>
+          <p:nvPr/>
+        </p:nvPicPr>
+        <p:blipFill>
+          <a:blip r:embed="rId2"/>
+          <a:stretch>
+            <a:fillRect/>
+          </a:stretch>
+        </p:blipFill>
+        <p:spPr bwMode="auto">
+          <a:xfrm>
+            <a:off x="2489200" y="2324100"/>
+            <a:ext cx="7112000" cy="3848100"/>
+          </a:xfrm>
+          <a:prstGeom prst="rect">
+            <a:avLst/>
+          </a:prstGeom>
+          <a:noFill/>
+          <a:ln w="9525">
+            <a:noFill/>
+            <a:headEnd/>
+            <a:tailEnd/>
+          </a:ln>
+        </p:spPr>
+      </p:pic>
       <p:sp>
         <p:nvSpPr>
-          <p:cNvPr id="155" name="Google Shape;155;p23"/>
+          <p:cNvPr id="449" name="Google Shape;449;p31"/>
           <p:cNvSpPr txBox="1"/>
           <p:nvPr>
             <p:ph idx="12" type="sldNum"/>
@@ -44297,7 +44318,7 @@
             </a:pPr>
             <a:r>
               <a:rPr/>
-              <a:t>Ba ca hậu xử lý cứu được, ba ca vẫn sai — </a:t>
+              <a:t>Ba ca được chuẩn hóa đúng nhờ hậu xử lý, ba ca vẫn sai — </a:t>
             </a:r>
             <a:r>
               <a:rPr b="1"/>
@@ -44655,12 +44676,12 @@
                     <a:bodyPr/>
                     <a:lstStyle/>
                     <a:p>
-                      <a:pPr lvl="0" indent="0" marL="0" algn="r">
+                      <a:pPr lvl="0" indent="0" marL="0">
                         <a:buNone/>
                       </a:pPr>
                       <a:r>
                         <a:rPr/>
-                        <a:t>cải thiện được</a:t>
+                        <a:t>Cải thiện được</a:t>
                       </a:r>
                     </a:p>
                   </a:txBody>
@@ -44676,7 +44697,7 @@
                       </a:pPr>
                       <a:r>
                         <a:rPr/>
-                        <a:t>Giá phải trả</a:t>
+                        <a:t>Chi phí tính toán</a:t>
                       </a:r>
                     </a:p>
                   </a:txBody>
@@ -44704,7 +44725,7 @@
                     <a:bodyPr/>
                     <a:lstStyle/>
                     <a:p>
-                      <a:pPr lvl="0" indent="0" marL="0" algn="r">
+                      <a:pPr lvl="0" indent="0" marL="0">
                         <a:buNone/>
                       </a:pPr>
                       <a:r>
@@ -44751,7 +44772,7 @@
                     <a:bodyPr/>
                     <a:lstStyle/>
                     <a:p>
-                      <a:pPr lvl="0" indent="0" marL="0" algn="r">
+                      <a:pPr lvl="0" indent="0" marL="0">
                         <a:buNone/>
                       </a:pPr>
                       <a:r>
@@ -44806,7 +44827,7 @@
                     <a:bodyPr/>
                     <a:lstStyle/>
                     <a:p>
-                      <a:pPr lvl="0" indent="0" marL="0" algn="r">
+                      <a:pPr lvl="0" indent="0" marL="0">
                         <a:buNone/>
                       </a:pPr>
                       <a:r>
@@ -44857,7 +44878,7 @@
                     <a:bodyPr/>
                     <a:lstStyle/>
                     <a:p>
-                      <a:pPr lvl="0" indent="0" marL="0" algn="r">
+                      <a:pPr lvl="0" indent="0" marL="0">
                         <a:buNone/>
                       </a:pPr>
                       <a:r>
@@ -44920,7 +44941,7 @@
                     <a:bodyPr/>
                     <a:lstStyle/>
                     <a:p>
-                      <a:pPr lvl="0" indent="0" marL="0" algn="r">
+                      <a:pPr lvl="0" indent="0" marL="0">
                         <a:buNone/>
                       </a:pPr>
                       <a:r>
@@ -45927,7 +45948,7 @@
                       </a:pPr>
                       <a:r>
                         <a:rPr/>
-                        <a:t>điểm nghẽn lớn nhất — biển hai dòng</a:t>
+                        <a:t>Điểm nghẽn lớn nhất — biển hai dòng</a:t>
                       </a:r>
                     </a:p>
                   </a:txBody>
@@ -45974,7 +45995,7 @@
                       </a:pPr>
                       <a:r>
                         <a:rPr/>
-                        <a:t>Rẻ nhất: dữ liệu đã có sẵn</a:t>
+                        <a:t>Tối ưu hóa: dữ liệu đã có sẵn</a:t>
                       </a:r>
                     </a:p>
                   </a:txBody>
@@ -46318,7 +46339,7 @@
             </a:pPr>
             <a:r>
               <a:rPr/>
-              <a:t>Cảm ơn — và mời đặt câu hỏi</a:t>
+              <a:t>Cảm ơn</a:t>
             </a:r>
           </a:p>
         </p:txBody>
@@ -46366,7 +46387,7 @@
             </a:r>
             <a:r>
               <a:rPr/>
-              <a:t>, không bằng mô hình mạnh hơn — đóng góp </a:t>
+              <a:t>, không bằng mô hình nặng hơn — đóng góp </a:t>
             </a:r>
             <a:r>
               <a:rPr b="1"/>
@@ -46417,7 +46438,7 @@
             </a:pPr>
             <a:r>
               <a:rPr b="1"/>
-              <a:t>Xin cảm ơn thầy cô và các bạn đã lắng nghe.</a:t>
+              <a:t>Nhóm thực hiện xin trân trọng cảm ơn Quý Thầy/Cô và các bạn đã lắng nghe.</a:t>
             </a:r>
           </a:p>
         </p:txBody>
@@ -48169,7 +48190,7 @@
             </a:pPr>
             <a:r>
               <a:rPr/>
-              <a:t>Vì sao biển hai dòng làm gãy bộ nhận dạng</a:t>
+              <a:t>Vì sao biển hai dòng làm suy giảm hiệu năng OCR</a:t>
             </a:r>
           </a:p>
         </p:txBody>
@@ -49087,7 +49108,7 @@
   <p:cSld>
     <p:spTree>
       <p:nvGrpSpPr>
-        <p:cNvPr id="134" name="Shape 134"/>
+        <p:cNvPr id="428" name="Shape 428"/>
         <p:cNvGrpSpPr/>
         <p:nvPr/>
       </p:nvGrpSpPr>
@@ -49101,7 +49122,7 @@
       </p:grpSpPr>
       <p:sp>
         <p:nvSpPr>
-          <p:cNvPr id="142" name="Google Shape;142;p23"/>
+          <p:cNvPr id="436" name="Google Shape;436;p31"/>
           <p:cNvSpPr txBox="1"/>
           <p:nvPr>
             <p:ph type="title"/>
@@ -49109,8 +49130,8 @@
         </p:nvSpPr>
         <p:spPr>
           <a:xfrm>
-            <a:off x="774145" y="223964"/>
-            <a:ext cx="10579655" cy="785896"/>
+            <a:off x="771525" y="200025"/>
+            <a:ext cx="10582275" cy="790575"/>
           </a:xfrm>
           <a:prstGeom prst="rect">
             <a:avLst/>
@@ -49136,10 +49157,10 @@
       </p:sp>
       <p:sp>
         <p:nvSpPr>
-          <p:cNvPr id="143" name="Google Shape;143;p23"/>
+          <p:cNvPr id="437" name="Google Shape;437;p31"/>
           <p:cNvSpPr txBox="1"/>
           <p:nvPr>
-            <p:ph idx="1"/>
+            <p:ph idx="2" sz="half" type="body"/>
           </p:nvPr>
         </p:nvSpPr>
         <p:spPr/>
@@ -49163,20 +49184,41 @@
               <a:t>.</a:t>
             </a:r>
           </a:p>
-          <a:p>
-            <a:pPr lvl="0" indent="0" marL="0">
-              <a:buNone/>
-            </a:pPr>
-            <a:r>
-              <a:rPr/>
-              <a:t>![](figures/fig-đường ống-strip-ngang.png)</a:t>
-            </a:r>
-          </a:p>
         </p:txBody>
       </p:sp>
+      <p:pic>
+        <p:nvPicPr>
+          <p:cNvPr descr="figures/fig-pipeline-strip-ngang.png" id="0" name="Picture 1"/>
+          <p:cNvPicPr>
+            <a:picLocks noGrp="1" noChangeAspect="1"/>
+          </p:cNvPicPr>
+          <p:nvPr/>
+        </p:nvPicPr>
+        <p:blipFill>
+          <a:blip r:embed="rId2"/>
+          <a:stretch>
+            <a:fillRect/>
+          </a:stretch>
+        </p:blipFill>
+        <p:spPr bwMode="auto">
+          <a:xfrm>
+            <a:off x="3911600" y="2324100"/>
+            <a:ext cx="4292600" cy="3848100"/>
+          </a:xfrm>
+          <a:prstGeom prst="rect">
+            <a:avLst/>
+          </a:prstGeom>
+          <a:noFill/>
+          <a:ln w="9525">
+            <a:noFill/>
+            <a:headEnd/>
+            <a:tailEnd/>
+          </a:ln>
+        </p:spPr>
+      </p:pic>
       <p:sp>
         <p:nvSpPr>
-          <p:cNvPr id="155" name="Google Shape;155;p23"/>
+          <p:cNvPr id="449" name="Google Shape;449;p31"/>
           <p:cNvSpPr txBox="1"/>
           <p:nvPr>
             <p:ph idx="12" type="sldNum"/>
@@ -50121,7 +50163,7 @@
                     <a:bodyPr/>
                     <a:lstStyle/>
                     <a:p>
-                      <a:pPr lvl="0" indent="0" marL="0" algn="r">
+                      <a:pPr lvl="0" indent="0" marL="0">
                         <a:buNone/>
                       </a:pPr>
                       <a:r>
@@ -50137,7 +50179,7 @@
                     <a:bodyPr/>
                     <a:lstStyle/>
                     <a:p>
-                      <a:pPr lvl="0" indent="0" marL="0" algn="r">
+                      <a:pPr lvl="0" indent="0" marL="0">
                         <a:buNone/>
                       </a:pPr>
                       <a:r>
@@ -50180,7 +50222,7 @@
                     <a:bodyPr/>
                     <a:lstStyle/>
                     <a:p>
-                      <a:pPr lvl="0" indent="0" marL="0" algn="r">
+                      <a:pPr lvl="0" indent="0" marL="0">
                         <a:buNone/>
                       </a:pPr>
                       <a:r>
@@ -50199,7 +50241,7 @@
                     <a:bodyPr/>
                     <a:lstStyle/>
                     <a:p>
-                      <a:pPr lvl="0" indent="0" marL="0" algn="r">
+                      <a:pPr lvl="0" indent="0" marL="0">
                         <a:buNone/>
                       </a:pPr>
                       <a:r>
@@ -50246,7 +50288,7 @@
                     <a:bodyPr/>
                     <a:lstStyle/>
                     <a:p>
-                      <a:pPr lvl="0" indent="0" marL="0" algn="r">
+                      <a:pPr lvl="0" indent="0" marL="0">
                         <a:buNone/>
                       </a:pPr>
                       <a:r>
@@ -50261,7 +50303,7 @@
                     <a:bodyPr/>
                     <a:lstStyle/>
                     <a:p>
-                      <a:pPr lvl="0" indent="0" marL="0" algn="r">
+                      <a:pPr lvl="0" indent="0" marL="0">
                         <a:buNone/>
                       </a:pPr>
                       <a:r>
@@ -50308,7 +50350,7 @@
                     <a:bodyPr/>
                     <a:lstStyle/>
                     <a:p>
-                      <a:pPr lvl="0" indent="0" marL="0" algn="r">
+                      <a:pPr lvl="0" indent="0" marL="0">
                         <a:buNone/>
                       </a:pPr>
                       <a:r>
@@ -50323,7 +50365,7 @@
                     <a:bodyPr/>
                     <a:lstStyle/>
                     <a:p>
-                      <a:pPr lvl="0" indent="0" marL="0" algn="r">
+                      <a:pPr lvl="0" indent="0" marL="0">
                         <a:buNone/>
                       </a:pPr>
                       <a:r>
@@ -50370,7 +50412,7 @@
                     <a:bodyPr/>
                     <a:lstStyle/>
                     <a:p>
-                      <a:pPr lvl="0" indent="0" marL="0" algn="r">
+                      <a:pPr lvl="0" indent="0" marL="0">
                         <a:buNone/>
                       </a:pPr>
                       <a:r>
@@ -50385,7 +50427,7 @@
                     <a:bodyPr/>
                     <a:lstStyle/>
                     <a:p>
-                      <a:pPr lvl="0" indent="0" marL="0" algn="r">
+                      <a:pPr lvl="0" indent="0" marL="0">
                         <a:buNone/>
                       </a:pPr>
                       <a:r>
@@ -50436,7 +50478,7 @@
                     <a:bodyPr/>
                     <a:lstStyle/>
                     <a:p>
-                      <a:pPr lvl="0" indent="0" marL="0" algn="r">
+                      <a:pPr lvl="0" indent="0" marL="0">
                         <a:buNone/>
                       </a:pPr>
                       <a:r>
@@ -50451,7 +50493,7 @@
                     <a:bodyPr/>
                     <a:lstStyle/>
                     <a:p>
-                      <a:pPr lvl="0" indent="0" marL="0" algn="r">
+                      <a:pPr lvl="0" indent="0" marL="0">
                         <a:buNone/>
                       </a:pPr>
                       <a:r>
@@ -50502,7 +50544,7 @@
                     <a:bodyPr/>
                     <a:lstStyle/>
                     <a:p>
-                      <a:pPr lvl="0" indent="0" marL="0" algn="r">
+                      <a:pPr lvl="0" indent="0" marL="0">
                         <a:buNone/>
                       </a:pPr>
                       <a:r>
@@ -50517,7 +50559,7 @@
                     <a:bodyPr/>
                     <a:lstStyle/>
                     <a:p>
-                      <a:pPr lvl="0" indent="0" marL="0" algn="r">
+                      <a:pPr lvl="0" indent="0" marL="0">
                         <a:buNone/>
                       </a:pPr>
                       <a:r>
@@ -50564,7 +50606,7 @@
                     <a:bodyPr/>
                     <a:lstStyle/>
                     <a:p>
-                      <a:pPr lvl="0" indent="0" marL="0" algn="r">
+                      <a:pPr lvl="0" indent="0" marL="0">
                         <a:buNone/>
                       </a:pPr>
                       <a:r>
@@ -50583,7 +50625,7 @@
                     <a:bodyPr/>
                     <a:lstStyle/>
                     <a:p>
-                      <a:pPr lvl="0" indent="0" marL="0" algn="r">
+                      <a:pPr lvl="0" indent="0" marL="0">
                         <a:buNone/>
                       </a:pPr>
                       <a:r>

--- a/docs/slides/12-slides-mon-hoc.pptx
+++ b/docs/slides/12-slides-mon-hoc.pptx
@@ -46360,15 +46360,7 @@
             <a:pPr lvl="0"/>
             <a:r>
               <a:rPr/>
-              <a:t>Chạy đầu cuối trên máy </a:t>
-            </a:r>
-            <a:r>
-              <a:rPr b="1"/>
-              <a:t>không có GPU</a:t>
-            </a:r>
-            <a:r>
-              <a:rPr/>
-              <a:t>: bộ phát hiện đạt </a:t>
+              <a:t>Chạy đầu cuối trên CPU: phát hiện </a:t>
             </a:r>
             <a:r>
               <a:rPr b="1"/>
@@ -46379,7 +46371,7 @@
             <a:pPr lvl="0"/>
             <a:r>
               <a:rPr/>
-              <a:t>Bài toán biển hai dòng giải bằng </a:t>
+              <a:t>Biển hai dòng giải bằng </a:t>
             </a:r>
             <a:r>
               <a:rPr b="1"/>
@@ -46387,7 +46379,7 @@
             </a:r>
             <a:r>
               <a:rPr/>
-              <a:t>, không bằng mô hình nặng hơn — đóng góp </a:t>
+              <a:t>, không bằng mô hình nặng hơn — </a:t>
             </a:r>
             <a:r>
               <a:rPr b="1"/>
@@ -46398,7 +46390,7 @@
             <a:pPr lvl="0"/>
             <a:r>
               <a:rPr/>
-              <a:t>Hậu xử lý theo vị trí đóng góp </a:t>
+              <a:t>Hậu xử lý theo vị trí </a:t>
             </a:r>
             <a:r>
               <a:rPr b="1"/>
@@ -46414,14 +46406,14 @@
             </a:r>
             <a:r>
               <a:rPr/>
-              <a:t> trên 2.801 biển</a:t>
+              <a:t> / 2.801 biển</a:t>
             </a:r>
           </a:p>
           <a:p>
             <a:pPr lvl="0"/>
             <a:r>
               <a:rPr/>
-              <a:t>Phần chưa đạt: đọc đúng cả chuỗi </a:t>
+              <a:t>Chưa đạt: đọc đúng cả chuỗi </a:t>
             </a:r>
             <a:r>
               <a:rPr b="1"/>
@@ -46429,7 +46421,7 @@
             </a:r>
             <a:r>
               <a:rPr/>
-              <a:t> so với ngưỡng 0,85, khoảng cách nằm trọn ở biển hai dòng</a:t>
+              <a:t> so với ngưỡng 0,85</a:t>
             </a:r>
           </a:p>
           <a:p>
@@ -48190,7 +48182,7 @@
             </a:pPr>
             <a:r>
               <a:rPr/>
-              <a:t>Vì sao biển hai dòng làm suy giảm hiệu năng OCR</a:t>
+              <a:t>Vì sao biển hai dòng làm OCR đọc sai</a:t>
             </a:r>
           </a:p>
         </p:txBody>

--- a/docs/slides/12-slides-mon-hoc.pptx
+++ b/docs/slides/12-slides-mon-hoc.pptx
@@ -50603,11 +50603,11 @@
                       </a:pPr>
                       <a:r>
                         <a:rPr b="1"/>
-                        <a:t>1.143</a:t>
+                        <a:t>510</a:t>
                       </a:r>
                       <a:r>
                         <a:rPr/>
-                        <a:t> · 406 ms</a:t>
+                        <a:t> · 150 ms</a:t>
                       </a:r>
                     </a:p>
                   </a:txBody>
@@ -50637,7 +50637,7 @@
                       </a:pPr>
                       <a:r>
                         <a:rPr/>
-                        <a:t>🟡</a:t>
+                        <a:t>✅</a:t>
                       </a:r>
                     </a:p>
                   </a:txBody>

--- a/docs/slides/12-slides-mon-hoc.pptx
+++ b/docs/slides/12-slides-mon-hoc.pptx
@@ -44049,8 +44049,8 @@
         </p:blipFill>
         <p:spPr bwMode="auto">
           <a:xfrm>
-            <a:off x="2489200" y="2324100"/>
-            <a:ext cx="7112000" cy="3848100"/>
+            <a:off x="2032000" y="2324100"/>
+            <a:ext cx="8039100" cy="3848100"/>
           </a:xfrm>
           <a:prstGeom prst="rect">
             <a:avLst/>
@@ -44624,353 +44624,45 @@
             </a:r>
             <a:r>
               <a:rPr/>
-              <a:t> — kể cả khi bằng 0.</a:t>
+              <a:t> — kể cả khi bằng 0. </a:t>
+            </a:r>
+            <a:r>
+              <a:rPr i="1"/>
+              <a:t>(Đối chứng: tách-ghép trên Tesseract chỉ +0,03 điểm)</a:t>
             </a:r>
           </a:p>
         </p:txBody>
       </p:sp>
-      <p:graphicFrame>
-        <p:nvGraphicFramePr>
-          <p:cNvPr id="6" name="Content Placeholder 5"/>
-          <p:cNvGraphicFramePr>
-            <a:graphicFrameLocks noGrp="1"/>
-          </p:cNvGraphicFramePr>
-          <p:nvPr>
-            <p:ph idx="1"/>
-          </p:nvPr>
-        </p:nvGraphicFramePr>
-        <p:xfrm>
-          <a:off x="762000" y="2324100"/>
-          <a:ext cx="10579100" cy="3848100"/>
-        </p:xfrm>
-        <a:graphic>
-          <a:graphicData uri="http://schemas.openxmlformats.org/drawingml/2006/table">
-            <a:tbl>
-              <a:tblPr firstRow="1" bandRow="1">
-                <a:tableStyleId>{45BEF19B-5B1D-4A26-B267-ECC71EF7E2D4}</a:tableStyleId>
-              </a:tblPr>
-              <a:tblGrid>
-                <a:gridCol w="3517900"/>
-                <a:gridCol w="3517900"/>
-                <a:gridCol w="3517900"/>
-              </a:tblGrid>
-              <a:tr h="0">
-                <a:tc>
-                  <a:txBody>
-                    <a:bodyPr/>
-                    <a:lstStyle/>
-                    <a:p>
-                      <a:pPr lvl="0" indent="0" marL="0">
-                        <a:buNone/>
-                      </a:pPr>
-                      <a:r>
-                        <a:rPr/>
-                        <a:t>Bước xử lý ảnh</a:t>
-                      </a:r>
-                    </a:p>
-                  </a:txBody>
-                  <a:tcPr/>
-                </a:tc>
-                <a:tc>
-                  <a:txBody>
-                    <a:bodyPr/>
-                    <a:lstStyle/>
-                    <a:p>
-                      <a:pPr lvl="0" indent="0" marL="0">
-                        <a:buNone/>
-                      </a:pPr>
-                      <a:r>
-                        <a:rPr/>
-                        <a:t>Cải thiện được</a:t>
-                      </a:r>
-                    </a:p>
-                  </a:txBody>
-                  <a:tcPr/>
-                </a:tc>
-                <a:tc>
-                  <a:txBody>
-                    <a:bodyPr/>
-                    <a:lstStyle/>
-                    <a:p>
-                      <a:pPr lvl="0" indent="0" marL="0">
-                        <a:buNone/>
-                      </a:pPr>
-                      <a:r>
-                        <a:rPr/>
-                        <a:t>Chi phí tính toán</a:t>
-                      </a:r>
-                    </a:p>
-                  </a:txBody>
-                  <a:tcPr/>
-                </a:tc>
-              </a:tr>
-              <a:tr h="0">
-                <a:tc>
-                  <a:txBody>
-                    <a:bodyPr/>
-                    <a:lstStyle/>
-                    <a:p>
-                      <a:pPr lvl="0" indent="0" marL="0">
-                        <a:buNone/>
-                      </a:pPr>
-                      <a:r>
-                        <a:rPr b="1"/>
-                        <a:t>Tách hai nửa + ghép ngang</a:t>
-                      </a:r>
-                    </a:p>
-                  </a:txBody>
-                </a:tc>
-                <a:tc>
-                  <a:txBody>
-                    <a:bodyPr/>
-                    <a:lstStyle/>
-                    <a:p>
-                      <a:pPr lvl="0" indent="0" marL="0">
-                        <a:buNone/>
-                      </a:pPr>
-                      <a:r>
-                        <a:rPr b="1"/>
-                        <a:t>+34,92 điểm</a:t>
-                      </a:r>
-                    </a:p>
-                  </a:txBody>
-                </a:tc>
-                <a:tc>
-                  <a:txBody>
-                    <a:bodyPr/>
-                    <a:lstStyle/>
-                    <a:p>
-                      <a:pPr lvl="0" indent="0" marL="0">
-                        <a:buNone/>
-                      </a:pPr>
-                      <a:r>
-                        <a:rPr/>
-                        <a:t>~0 ms</a:t>
-                      </a:r>
-                    </a:p>
-                  </a:txBody>
-                </a:tc>
-              </a:tr>
-              <a:tr h="0">
-                <a:tc>
-                  <a:txBody>
-                    <a:bodyPr/>
-                    <a:lstStyle/>
-                    <a:p>
-                      <a:pPr lvl="0" indent="0" marL="0">
-                        <a:buNone/>
-                      </a:pPr>
-                      <a:r>
-                        <a:rPr b="1"/>
-                        <a:t>Bộ luật hậu xử lý</a:t>
-                      </a:r>
-                    </a:p>
-                  </a:txBody>
-                </a:tc>
-                <a:tc>
-                  <a:txBody>
-                    <a:bodyPr/>
-                    <a:lstStyle/>
-                    <a:p>
-                      <a:pPr lvl="0" indent="0" marL="0">
-                        <a:buNone/>
-                      </a:pPr>
-                      <a:r>
-                        <a:rPr b="1"/>
-                        <a:t>+13,28 điểm</a:t>
-                      </a:r>
-                      <a:r>
-                        <a:rPr/>
-                        <a:t> · 372 sửa đúng, </a:t>
-                      </a:r>
-                      <a:r>
-                        <a:rPr b="1"/>
-                        <a:t>0 hỏng</a:t>
-                      </a:r>
-                    </a:p>
-                  </a:txBody>
-                </a:tc>
-                <a:tc>
-                  <a:txBody>
-                    <a:bodyPr/>
-                    <a:lstStyle/>
-                    <a:p>
-                      <a:pPr lvl="0" indent="0" marL="0">
-                        <a:buNone/>
-                      </a:pPr>
-                      <a:r>
-                        <a:rPr/>
-                        <a:t>0,03 ms</a:t>
-                      </a:r>
-                    </a:p>
-                  </a:txBody>
-                </a:tc>
-              </a:tr>
-              <a:tr h="0">
-                <a:tc>
-                  <a:txBody>
-                    <a:bodyPr/>
-                    <a:lstStyle/>
-                    <a:p>
-                      <a:pPr lvl="0" indent="0" marL="0">
-                        <a:buNone/>
-                      </a:pPr>
-                      <a:r>
-                        <a:rPr/>
-                        <a:t>Nắn hình + giãn dọc</a:t>
-                      </a:r>
-                    </a:p>
-                  </a:txBody>
-                </a:tc>
-                <a:tc>
-                  <a:txBody>
-                    <a:bodyPr/>
-                    <a:lstStyle/>
-                    <a:p>
-                      <a:pPr lvl="0" indent="0" marL="0">
-                        <a:buNone/>
-                      </a:pPr>
-                      <a:r>
-                        <a:rPr b="1"/>
-                        <a:t>+34 biển</a:t>
-                      </a:r>
-                    </a:p>
-                  </a:txBody>
-                </a:tc>
-                <a:tc>
-                  <a:txBody>
-                    <a:bodyPr/>
-                    <a:lstStyle/>
-                    <a:p>
-                      <a:pPr lvl="0" indent="0" marL="0">
-                        <a:buNone/>
-                      </a:pPr>
-                      <a:r>
-                        <a:rPr/>
-                        <a:t>+244 ms ở p95</a:t>
-                      </a:r>
-                    </a:p>
-                  </a:txBody>
-                </a:tc>
-              </a:tr>
-              <a:tr h="0">
-                <a:tc>
-                  <a:txBody>
-                    <a:bodyPr/>
-                    <a:lstStyle/>
-                    <a:p>
-                      <a:pPr lvl="0" indent="0" marL="0">
-                        <a:buNone/>
-                      </a:pPr>
-                      <a:r>
-                        <a:rPr/>
-                        <a:t>Siêu phân giải — đã </a:t>
-                      </a:r>
-                      <a:r>
-                        <a:rPr b="1"/>
-                        <a:t>tắt</a:t>
-                      </a:r>
-                    </a:p>
-                  </a:txBody>
-                </a:tc>
-                <a:tc>
-                  <a:txBody>
-                    <a:bodyPr/>
-                    <a:lstStyle/>
-                    <a:p>
-                      <a:pPr lvl="0" indent="0" marL="0">
-                        <a:buNone/>
-                      </a:pPr>
-                      <a:r>
-                        <a:rPr b="1"/>
-                        <a:t>0 biển</a:t>
-                      </a:r>
-                      <a:r>
-                        <a:rPr/>
-                        <a:t>, nhưng </a:t>
-                      </a:r>
-                      <a:r>
-                        <a:rPr b="1"/>
-                        <a:t>0/120 mẫu lọt cổng</a:t>
-                      </a:r>
-                    </a:p>
-                  </a:txBody>
-                </a:tc>
-                <a:tc>
-                  <a:txBody>
-                    <a:bodyPr/>
-                    <a:lstStyle/>
-                    <a:p>
-                      <a:pPr lvl="0" indent="0" marL="0">
-                        <a:buNone/>
-                      </a:pPr>
-                      <a:r>
-                        <a:rPr/>
-                        <a:t>+319 ms p95</a:t>
-                      </a:r>
-                    </a:p>
-                  </a:txBody>
-                </a:tc>
-              </a:tr>
-              <a:tr h="0">
-                <a:tc>
-                  <a:txBody>
-                    <a:bodyPr/>
-                    <a:lstStyle/>
-                    <a:p>
-                      <a:pPr lvl="0" indent="0" marL="0">
-                        <a:buNone/>
-                      </a:pPr>
-                      <a:r>
-                        <a:rPr i="1"/>
-                        <a:t>Đối chứng:</a:t>
-                      </a:r>
-                      <a:r>
-                        <a:rPr/>
-                        <a:t> tách-ghép trên </a:t>
-                      </a:r>
-                      <a:r>
-                        <a:rPr b="1"/>
-                        <a:t>Tesseract</a:t>
-                      </a:r>
-                    </a:p>
-                  </a:txBody>
-                </a:tc>
-                <a:tc>
-                  <a:txBody>
-                    <a:bodyPr/>
-                    <a:lstStyle/>
-                    <a:p>
-                      <a:pPr lvl="0" indent="0" marL="0">
-                        <a:buNone/>
-                      </a:pPr>
-                      <a:r>
-                        <a:rPr b="1"/>
-                        <a:t>+0,03 điểm</a:t>
-                      </a:r>
-                    </a:p>
-                  </a:txBody>
-                </a:tc>
-                <a:tc>
-                  <a:txBody>
-                    <a:bodyPr/>
-                    <a:lstStyle/>
-                    <a:p>
-                      <a:pPr lvl="0" indent="0" marL="0">
-                        <a:buNone/>
-                      </a:pPr>
-                      <a:r>
-                        <a:rPr/>
-                        <a:t>—</a:t>
-                      </a:r>
-                    </a:p>
-                  </a:txBody>
-                </a:tc>
-              </a:tr>
-            </a:tbl>
-          </a:graphicData>
-        </a:graphic>
-      </p:graphicFrame>
+      <p:pic>
+        <p:nvPicPr>
+          <p:cNvPr descr="figures/fig-mon-hoc-donggop.png" id="0" name="Picture 1"/>
+          <p:cNvPicPr>
+            <a:picLocks noGrp="1" noChangeAspect="1"/>
+          </p:cNvPicPr>
+          <p:nvPr/>
+        </p:nvPicPr>
+        <p:blipFill>
+          <a:blip r:embed="rId2"/>
+          <a:stretch>
+            <a:fillRect/>
+          </a:stretch>
+        </p:blipFill>
+        <p:spPr bwMode="auto">
+          <a:xfrm>
+            <a:off x="762000" y="2781300"/>
+            <a:ext cx="10579100" cy="2933700"/>
+          </a:xfrm>
+          <a:prstGeom prst="rect">
+            <a:avLst/>
+          </a:prstGeom>
+          <a:noFill/>
+          <a:ln w="9525">
+            <a:noFill/>
+            <a:headEnd/>
+            <a:tailEnd/>
+          </a:ln>
+        </p:spPr>
+      </p:pic>
       <p:sp>
         <p:nvSpPr>
           <p:cNvPr id="449" name="Google Shape;449;p31"/>
@@ -46364,7 +46056,7 @@
             </a:r>
             <a:r>
               <a:rPr b="1"/>
-              <a:t>mAP@0,5 = 0,9829</a:t>
+              <a:t>mAP@0.5 = 0,9829</a:t>
             </a:r>
           </a:p>
           <a:p>
@@ -47120,7 +46812,7 @@
                       </a:pPr>
                       <a:r>
                         <a:rPr/>
-                        <a:t>mAP@0,5 của bộ phát hiện</a:t>
+                        <a:t>mAP@0.5 của bộ phát hiện</a:t>
                       </a:r>
                     </a:p>
                   </a:txBody>
@@ -47631,325 +47323,41 @@
             </a:r>
             <a:r>
               <a:rPr/>
-              <a:t> — không khử thì đang đo trí nhớ.</a:t>
+              <a:t> — không khử thì đang đo trí nhớ</a:t>
             </a:r>
           </a:p>
         </p:txBody>
       </p:sp>
-      <p:graphicFrame>
-        <p:nvGraphicFramePr>
-          <p:cNvPr id="6" name="Content Placeholder 5"/>
-          <p:cNvGraphicFramePr>
-            <a:graphicFrameLocks noGrp="1"/>
-          </p:cNvGraphicFramePr>
-          <p:nvPr>
-            <p:ph idx="1"/>
-          </p:nvPr>
-        </p:nvGraphicFramePr>
-        <p:xfrm>
-          <a:off x="762000" y="2324100"/>
-          <a:ext cx="10579100" cy="3848100"/>
-        </p:xfrm>
-        <a:graphic>
-          <a:graphicData uri="http://schemas.openxmlformats.org/drawingml/2006/table">
-            <a:tbl>
-              <a:tblPr firstRow="1" bandRow="1">
-                <a:tableStyleId>{45BEF19B-5B1D-4A26-B267-ECC71EF7E2D4}</a:tableStyleId>
-              </a:tblPr>
-              <a:tblGrid>
-                <a:gridCol w="5283200"/>
-                <a:gridCol w="5283200"/>
-              </a:tblGrid>
-              <a:tr h="0">
-                <a:tc>
-                  <a:txBody>
-                    <a:bodyPr/>
-                    <a:lstStyle/>
-                    <a:p>
-                      <a:pPr lvl="0" indent="0" marL="0">
-                        <a:buNone/>
-                      </a:pPr>
-                      <a:r>
-                        <a:rPr/>
-                        <a:t>Bước</a:t>
-                      </a:r>
-                    </a:p>
-                  </a:txBody>
-                  <a:tcPr/>
-                </a:tc>
-                <a:tc>
-                  <a:txBody>
-                    <a:bodyPr/>
-                    <a:lstStyle/>
-                    <a:p>
-                      <a:pPr lvl="0" indent="0" marL="0">
-                        <a:buNone/>
-                      </a:pPr>
-                      <a:r>
-                        <a:rPr/>
-                        <a:t>Kết quả</a:t>
-                      </a:r>
-                    </a:p>
-                  </a:txBody>
-                  <a:tcPr/>
-                </a:tc>
-              </a:tr>
-              <a:tr h="0">
-                <a:tc>
-                  <a:txBody>
-                    <a:bodyPr/>
-                    <a:lstStyle/>
-                    <a:p>
-                      <a:pPr lvl="0" indent="0" marL="0">
-                        <a:buNone/>
-                      </a:pPr>
-                      <a:r>
-                        <a:rPr/>
-                        <a:t>Hợp nhất </a:t>
-                      </a:r>
-                      <a:r>
-                        <a:rPr b="1"/>
-                        <a:t>7 bộ công khai</a:t>
-                      </a:r>
-                    </a:p>
-                  </a:txBody>
-                </a:tc>
-                <a:tc>
-                  <a:txBody>
-                    <a:bodyPr/>
-                    <a:lstStyle/>
-                    <a:p>
-                      <a:pPr lvl="0" indent="0" marL="0">
-                        <a:buNone/>
-                      </a:pPr>
-                      <a:r>
-                        <a:rPr/>
-                        <a:t>27.111 ảnh</a:t>
-                      </a:r>
-                    </a:p>
-                  </a:txBody>
-                </a:tc>
-              </a:tr>
-              <a:tr h="0">
-                <a:tc>
-                  <a:txBody>
-                    <a:bodyPr/>
-                    <a:lstStyle/>
-                    <a:p>
-                      <a:pPr lvl="0" indent="0" marL="0">
-                        <a:buNone/>
-                      </a:pPr>
-                      <a:r>
-                        <a:rPr/>
-                        <a:t>Khử trùng lặp chéo bộ, băm tri giác </a:t>
-                      </a:r>
-                      <a:r>
-                        <a:rPr b="1"/>
-                        <a:t>DCT 64 bit</a:t>
-                      </a:r>
-                    </a:p>
-                  </a:txBody>
-                </a:tc>
-                <a:tc>
-                  <a:txBody>
-                    <a:bodyPr/>
-                    <a:lstStyle/>
-                    <a:p>
-                      <a:pPr lvl="0" indent="0" marL="0">
-                        <a:buNone/>
-                      </a:pPr>
-                      <a:r>
-                        <a:rPr/>
-                        <a:t>còn </a:t>
-                      </a:r>
-                      <a:r>
-                        <a:rPr b="1"/>
-                        <a:t>15.133</a:t>
-                      </a:r>
-                      <a:r>
-                        <a:rPr/>
-                        <a:t> ảnh · loại </a:t>
-                      </a:r>
-                      <a:r>
-                        <a:rPr b="1"/>
-                        <a:t>44,2%</a:t>
-                      </a:r>
-                    </a:p>
-                  </a:txBody>
-                </a:tc>
-              </a:tr>
-              <a:tr h="0">
-                <a:tc>
-                  <a:txBody>
-                    <a:bodyPr/>
-                    <a:lstStyle/>
-                    <a:p>
-                      <a:pPr lvl="0" indent="0" marL="0">
-                        <a:buNone/>
-                      </a:pPr>
-                      <a:r>
-                        <a:rPr/>
-                        <a:t>Ca cực đoan</a:t>
-                      </a:r>
-                    </a:p>
-                  </a:txBody>
-                </a:tc>
-                <a:tc>
-                  <a:txBody>
-                    <a:bodyPr/>
-                    <a:lstStyle/>
-                    <a:p>
-                      <a:pPr lvl="0" indent="0" marL="0">
-                        <a:buNone/>
-                      </a:pPr>
-                      <a:r>
-                        <a:rPr/>
-                        <a:t>một bộ vào </a:t>
-                      </a:r>
-                      <a:r>
-                        <a:rPr b="1"/>
-                        <a:t>1.005</a:t>
-                      </a:r>
-                      <a:r>
-                        <a:rPr/>
-                        <a:t> ảnh, ra </a:t>
-                      </a:r>
-                      <a:r>
-                        <a:rPr b="1"/>
-                        <a:t>0</a:t>
-                      </a:r>
-                      <a:r>
-                        <a:rPr/>
-                        <a:t> ảnh</a:t>
-                      </a:r>
-                    </a:p>
-                  </a:txBody>
-                </a:tc>
-              </a:tr>
-              <a:tr h="0">
-                <a:tc>
-                  <a:txBody>
-                    <a:bodyPr/>
-                    <a:lstStyle/>
-                    <a:p>
-                      <a:pPr lvl="0" indent="0" marL="0">
-                        <a:buNone/>
-                      </a:pPr>
-                      <a:r>
-                        <a:rPr/>
-                        <a:t>Băm đa chỉ mục (nguyên lý chuồng bồ câu)</a:t>
-                      </a:r>
-                    </a:p>
-                  </a:txBody>
-                </a:tc>
-                <a:tc>
-                  <a:txBody>
-                    <a:bodyPr/>
-                    <a:lstStyle/>
-                    <a:p>
-                      <a:pPr lvl="0" indent="0" marL="0">
-                        <a:buNone/>
-                      </a:pPr>
-                      <a:r>
-                        <a:rPr/>
-                        <a:t>thuật toán </a:t>
-                      </a:r>
-                      <a:r>
-                        <a:rPr b="1"/>
-                        <a:t>chính xác</a:t>
-                      </a:r>
-                      <a:r>
-                        <a:rPr/>
-                        <a:t>, không xấp xỉ</a:t>
-                      </a:r>
-                    </a:p>
-                  </a:txBody>
-                </a:tc>
-              </a:tr>
-              <a:tr h="0">
-                <a:tc>
-                  <a:txBody>
-                    <a:bodyPr/>
-                    <a:lstStyle/>
-                    <a:p>
-                      <a:pPr lvl="0" indent="0" marL="0">
-                        <a:buNone/>
-                      </a:pPr>
-                      <a:r>
-                        <a:rPr/>
-                        <a:t>Chia tập, giữ nhóm trùng cùng một bên</a:t>
-                      </a:r>
-                    </a:p>
-                  </a:txBody>
-                </a:tc>
-                <a:tc>
-                  <a:txBody>
-                    <a:bodyPr/>
-                    <a:lstStyle/>
-                    <a:p>
-                      <a:pPr lvl="0" indent="0" marL="0">
-                        <a:buNone/>
-                      </a:pPr>
-                      <a:r>
-                        <a:rPr/>
-                        <a:t>10.592 / 3.027 / </a:t>
-                      </a:r>
-                      <a:r>
-                        <a:rPr b="1"/>
-                        <a:t>1.514</a:t>
-                      </a:r>
-                    </a:p>
-                  </a:txBody>
-                </a:tc>
-              </a:tr>
-              <a:tr h="0">
-                <a:tc>
-                  <a:txBody>
-                    <a:bodyPr/>
-                    <a:lstStyle/>
-                    <a:p>
-                      <a:pPr lvl="0" indent="0" marL="0">
-                        <a:buNone/>
-                      </a:pPr>
-                      <a:r>
-                        <a:rPr b="1"/>
-                        <a:t>Giới hạn còn lại</a:t>
-                      </a:r>
-                    </a:p>
-                  </a:txBody>
-                </a:tc>
-                <a:tc>
-                  <a:txBody>
-                    <a:bodyPr/>
-                    <a:lstStyle/>
-                    <a:p>
-                      <a:pPr lvl="0" indent="0" marL="0">
-                        <a:buNone/>
-                      </a:pPr>
-                      <a:r>
-                        <a:rPr/>
-                        <a:t>pHash tóm tắt </a:t>
-                      </a:r>
-                      <a:r>
-                        <a:rPr b="1"/>
-                        <a:t>khung ảnh</a:t>
-                      </a:r>
-                      <a:r>
-                        <a:rPr/>
-                        <a:t>, không tóm tắt </a:t>
-                      </a:r>
-                      <a:r>
-                        <a:rPr b="1"/>
-                        <a:t>chiếc xe</a:t>
-                      </a:r>
-                    </a:p>
-                  </a:txBody>
-                </a:tc>
-              </a:tr>
-            </a:tbl>
-          </a:graphicData>
-        </a:graphic>
-      </p:graphicFrame>
+      <p:pic>
+        <p:nvPicPr>
+          <p:cNvPr descr="figures/fig-mon-hoc-funnel.png" id="0" name="Picture 1"/>
+          <p:cNvPicPr>
+            <a:picLocks noGrp="1" noChangeAspect="1"/>
+          </p:cNvPicPr>
+          <p:nvPr/>
+        </p:nvPicPr>
+        <p:blipFill>
+          <a:blip r:embed="rId2"/>
+          <a:stretch>
+            <a:fillRect/>
+          </a:stretch>
+        </p:blipFill>
+        <p:spPr bwMode="auto">
+          <a:xfrm>
+            <a:off x="1320800" y="2324100"/>
+            <a:ext cx="9474200" cy="3848100"/>
+          </a:xfrm>
+          <a:prstGeom prst="rect">
+            <a:avLst/>
+          </a:prstGeom>
+          <a:noFill/>
+          <a:ln w="9525">
+            <a:noFill/>
+            <a:headEnd/>
+            <a:tailEnd/>
+          </a:ln>
+        </p:spPr>
+      </p:pic>
       <p:sp>
         <p:nvSpPr>
           <p:cNvPr id="449" name="Google Shape;449;p31"/>
@@ -50102,551 +49510,41 @@
             </a:r>
             <a:r>
               <a:rPr/>
-              <a:t>.</a:t>
+              <a:t> — riêng biển một dòng đạt 0,9541</a:t>
             </a:r>
           </a:p>
         </p:txBody>
       </p:sp>
-      <p:graphicFrame>
-        <p:nvGraphicFramePr>
-          <p:cNvPr id="6" name="Content Placeholder 5"/>
-          <p:cNvGraphicFramePr>
-            <a:graphicFrameLocks noGrp="1"/>
-          </p:cNvGraphicFramePr>
-          <p:nvPr>
-            <p:ph idx="1"/>
-          </p:nvPr>
-        </p:nvGraphicFramePr>
-        <p:xfrm>
-          <a:off x="762000" y="2324100"/>
-          <a:ext cx="10579100" cy="3848100"/>
-        </p:xfrm>
-        <a:graphic>
-          <a:graphicData uri="http://schemas.openxmlformats.org/drawingml/2006/table">
-            <a:tbl>
-              <a:tblPr firstRow="1" bandRow="1">
-                <a:tableStyleId>{45BEF19B-5B1D-4A26-B267-ECC71EF7E2D4}</a:tableStyleId>
-              </a:tblPr>
-              <a:tblGrid>
-                <a:gridCol w="2641600"/>
-                <a:gridCol w="2641600"/>
-                <a:gridCol w="2641600"/>
-                <a:gridCol w="2641600"/>
-              </a:tblGrid>
-              <a:tr h="0">
-                <a:tc>
-                  <a:txBody>
-                    <a:bodyPr/>
-                    <a:lstStyle/>
-                    <a:p>
-                      <a:pPr lvl="0" indent="0" marL="0">
-                        <a:buNone/>
-                      </a:pPr>
-                      <a:r>
-                        <a:rPr/>
-                        <a:t>Đo cái gì</a:t>
-                      </a:r>
-                    </a:p>
-                  </a:txBody>
-                  <a:tcPr/>
-                </a:tc>
-                <a:tc>
-                  <a:txBody>
-                    <a:bodyPr/>
-                    <a:lstStyle/>
-                    <a:p>
-                      <a:pPr lvl="0" indent="0" marL="0">
-                        <a:buNone/>
-                      </a:pPr>
-                      <a:r>
-                        <a:rPr/>
-                        <a:t>Đo được</a:t>
-                      </a:r>
-                    </a:p>
-                  </a:txBody>
-                  <a:tcPr/>
-                </a:tc>
-                <a:tc>
-                  <a:txBody>
-                    <a:bodyPr/>
-                    <a:lstStyle/>
-                    <a:p>
-                      <a:pPr lvl="0" indent="0" marL="0">
-                        <a:buNone/>
-                      </a:pPr>
-                      <a:r>
-                        <a:rPr/>
-                        <a:t>Ngưỡng</a:t>
-                      </a:r>
-                    </a:p>
-                  </a:txBody>
-                  <a:tcPr/>
-                </a:tc>
-                <a:tc>
-                  <a:txBody>
-                    <a:bodyPr/>
-                    <a:lstStyle/>
-                    <a:p>
-                      <a:endParaRPr/>
-                    </a:p>
-                  </a:txBody>
-                  <a:tcPr/>
-                </a:tc>
-              </a:tr>
-              <a:tr h="0">
-                <a:tc>
-                  <a:txBody>
-                    <a:bodyPr/>
-                    <a:lstStyle/>
-                    <a:p>
-                      <a:pPr lvl="0" indent="0" marL="0">
-                        <a:buNone/>
-                      </a:pPr>
-                      <a:r>
-                        <a:rPr/>
-                        <a:t>mAP@0,5 · mAP@0,5:0,95</a:t>
-                      </a:r>
-                    </a:p>
-                  </a:txBody>
-                </a:tc>
-                <a:tc>
-                  <a:txBody>
-                    <a:bodyPr/>
-                    <a:lstStyle/>
-                    <a:p>
-                      <a:pPr lvl="0" indent="0" marL="0">
-                        <a:buNone/>
-                      </a:pPr>
-                      <a:r>
-                        <a:rPr b="1"/>
-                        <a:t>0,9829</a:t>
-                      </a:r>
-                      <a:r>
-                        <a:rPr/>
-                        <a:t> · 0,7834</a:t>
-                      </a:r>
-                    </a:p>
-                  </a:txBody>
-                </a:tc>
-                <a:tc>
-                  <a:txBody>
-                    <a:bodyPr/>
-                    <a:lstStyle/>
-                    <a:p>
-                      <a:pPr lvl="0" indent="0" marL="0">
-                        <a:buNone/>
-                      </a:pPr>
-                      <a:r>
-                        <a:rPr/>
-                        <a:t>0,90 · 0,65</a:t>
-                      </a:r>
-                    </a:p>
-                  </a:txBody>
-                </a:tc>
-                <a:tc>
-                  <a:txBody>
-                    <a:bodyPr/>
-                    <a:lstStyle/>
-                    <a:p>
-                      <a:pPr lvl="0" indent="0" marL="0" algn="ctr">
-                        <a:buNone/>
-                      </a:pPr>
-                      <a:r>
-                        <a:rPr/>
-                        <a:t>✅</a:t>
-                      </a:r>
-                    </a:p>
-                  </a:txBody>
-                </a:tc>
-              </a:tr>
-              <a:tr h="0">
-                <a:tc>
-                  <a:txBody>
-                    <a:bodyPr/>
-                    <a:lstStyle/>
-                    <a:p>
-                      <a:pPr lvl="0" indent="0" marL="0">
-                        <a:buNone/>
-                      </a:pPr>
-                      <a:r>
-                        <a:rPr/>
-                        <a:t>Precision · Recall</a:t>
-                      </a:r>
-                    </a:p>
-                  </a:txBody>
-                </a:tc>
-                <a:tc>
-                  <a:txBody>
-                    <a:bodyPr/>
-                    <a:lstStyle/>
-                    <a:p>
-                      <a:pPr lvl="0" indent="0" marL="0">
-                        <a:buNone/>
-                      </a:pPr>
-                      <a:r>
-                        <a:rPr/>
-                        <a:t>0,9837 · 0,9714</a:t>
-                      </a:r>
-                    </a:p>
-                  </a:txBody>
-                </a:tc>
-                <a:tc>
-                  <a:txBody>
-                    <a:bodyPr/>
-                    <a:lstStyle/>
-                    <a:p>
-                      <a:pPr lvl="0" indent="0" marL="0">
-                        <a:buNone/>
-                      </a:pPr>
-                      <a:r>
-                        <a:rPr/>
-                        <a:t>0,92 · 0,90</a:t>
-                      </a:r>
-                    </a:p>
-                  </a:txBody>
-                </a:tc>
-                <a:tc>
-                  <a:txBody>
-                    <a:bodyPr/>
-                    <a:lstStyle/>
-                    <a:p>
-                      <a:pPr lvl="0" indent="0" marL="0" algn="ctr">
-                        <a:buNone/>
-                      </a:pPr>
-                      <a:r>
-                        <a:rPr/>
-                        <a:t>✅</a:t>
-                      </a:r>
-                    </a:p>
-                  </a:txBody>
-                </a:tc>
-              </a:tr>
-              <a:tr h="0">
-                <a:tc>
-                  <a:txBody>
-                    <a:bodyPr/>
-                    <a:lstStyle/>
-                    <a:p>
-                      <a:pPr lvl="0" indent="0" marL="0">
-                        <a:buNone/>
-                      </a:pPr>
-                      <a:r>
-                        <a:rPr/>
-                        <a:t>Đúng mức ký tự (1 − CER)</a:t>
-                      </a:r>
-                    </a:p>
-                  </a:txBody>
-                </a:tc>
-                <a:tc>
-                  <a:txBody>
-                    <a:bodyPr/>
-                    <a:lstStyle/>
-                    <a:p>
-                      <a:pPr lvl="0" indent="0" marL="0">
-                        <a:buNone/>
-                      </a:pPr>
-                      <a:r>
-                        <a:rPr b="1"/>
-                        <a:t>0,9483</a:t>
-                      </a:r>
-                    </a:p>
-                  </a:txBody>
-                </a:tc>
-                <a:tc>
-                  <a:txBody>
-                    <a:bodyPr/>
-                    <a:lstStyle/>
-                    <a:p>
-                      <a:pPr lvl="0" indent="0" marL="0">
-                        <a:buNone/>
-                      </a:pPr>
-                      <a:r>
-                        <a:rPr/>
-                        <a:t>0,95</a:t>
-                      </a:r>
-                    </a:p>
-                  </a:txBody>
-                </a:tc>
-                <a:tc>
-                  <a:txBody>
-                    <a:bodyPr/>
-                    <a:lstStyle/>
-                    <a:p>
-                      <a:pPr lvl="0" indent="0" marL="0" algn="ctr">
-                        <a:buNone/>
-                      </a:pPr>
-                      <a:r>
-                        <a:rPr/>
-                        <a:t>🟡</a:t>
-                      </a:r>
-                    </a:p>
-                  </a:txBody>
-                </a:tc>
-              </a:tr>
-              <a:tr h="0">
-                <a:tc>
-                  <a:txBody>
-                    <a:bodyPr/>
-                    <a:lstStyle/>
-                    <a:p>
-                      <a:pPr lvl="0" indent="0" marL="0">
-                        <a:buNone/>
-                      </a:pPr>
-                      <a:r>
-                        <a:rPr/>
-                        <a:t>Đúng cả chuỗi, sau hậu xử lý</a:t>
-                      </a:r>
-                    </a:p>
-                  </a:txBody>
-                </a:tc>
-                <a:tc>
-                  <a:txBody>
-                    <a:bodyPr/>
-                    <a:lstStyle/>
-                    <a:p>
-                      <a:pPr lvl="0" indent="0" marL="0">
-                        <a:buNone/>
-                      </a:pPr>
-                      <a:r>
-                        <a:rPr b="1"/>
-                        <a:t>0,7701</a:t>
-                      </a:r>
-                    </a:p>
-                  </a:txBody>
-                </a:tc>
-                <a:tc>
-                  <a:txBody>
-                    <a:bodyPr/>
-                    <a:lstStyle/>
-                    <a:p>
-                      <a:pPr lvl="0" indent="0" marL="0">
-                        <a:buNone/>
-                      </a:pPr>
-                      <a:r>
-                        <a:rPr/>
-                        <a:t>0,90</a:t>
-                      </a:r>
-                    </a:p>
-                  </a:txBody>
-                </a:tc>
-                <a:tc>
-                  <a:txBody>
-                    <a:bodyPr/>
-                    <a:lstStyle/>
-                    <a:p>
-                      <a:pPr lvl="0" indent="0" marL="0" algn="ctr">
-                        <a:buNone/>
-                      </a:pPr>
-                      <a:r>
-                        <a:rPr/>
-                        <a:t>❌</a:t>
-                      </a:r>
-                    </a:p>
-                  </a:txBody>
-                </a:tc>
-              </a:tr>
-              <a:tr h="0">
-                <a:tc>
-                  <a:txBody>
-                    <a:bodyPr/>
-                    <a:lstStyle/>
-                    <a:p>
-                      <a:pPr lvl="0" indent="0" marL="0">
-                        <a:buNone/>
-                      </a:pPr>
-                      <a:r>
-                        <a:rPr/>
-                        <a:t>— riêng biển </a:t>
-                      </a:r>
-                      <a:r>
-                        <a:rPr b="1"/>
-                        <a:t>một dòng</a:t>
-                      </a:r>
-                    </a:p>
-                  </a:txBody>
-                </a:tc>
-                <a:tc>
-                  <a:txBody>
-                    <a:bodyPr/>
-                    <a:lstStyle/>
-                    <a:p>
-                      <a:pPr lvl="0" indent="0" marL="0">
-                        <a:buNone/>
-                      </a:pPr>
-                      <a:r>
-                        <a:rPr b="1"/>
-                        <a:t>0,9541</a:t>
-                      </a:r>
-                    </a:p>
-                  </a:txBody>
-                </a:tc>
-                <a:tc>
-                  <a:txBody>
-                    <a:bodyPr/>
-                    <a:lstStyle/>
-                    <a:p>
-                      <a:pPr lvl="0" indent="0" marL="0">
-                        <a:buNone/>
-                      </a:pPr>
-                      <a:r>
-                        <a:rPr/>
-                        <a:t>0,90</a:t>
-                      </a:r>
-                    </a:p>
-                  </a:txBody>
-                </a:tc>
-                <a:tc>
-                  <a:txBody>
-                    <a:bodyPr/>
-                    <a:lstStyle/>
-                    <a:p>
-                      <a:pPr lvl="0" indent="0" marL="0" algn="ctr">
-                        <a:buNone/>
-                      </a:pPr>
-                      <a:r>
-                        <a:rPr/>
-                        <a:t>✅</a:t>
-                      </a:r>
-                    </a:p>
-                  </a:txBody>
-                </a:tc>
-              </a:tr>
-              <a:tr h="0">
-                <a:tc>
-                  <a:txBody>
-                    <a:bodyPr/>
-                    <a:lstStyle/>
-                    <a:p>
-                      <a:pPr lvl="0" indent="0" marL="0">
-                        <a:buNone/>
-                      </a:pPr>
-                      <a:r>
-                        <a:rPr/>
-                        <a:t>— riêng biển </a:t>
-                      </a:r>
-                      <a:r>
-                        <a:rPr b="1"/>
-                        <a:t>hai dòng</a:t>
-                      </a:r>
-                    </a:p>
-                  </a:txBody>
-                </a:tc>
-                <a:tc>
-                  <a:txBody>
-                    <a:bodyPr/>
-                    <a:lstStyle/>
-                    <a:p>
-                      <a:pPr lvl="0" indent="0" marL="0">
-                        <a:buNone/>
-                      </a:pPr>
-                      <a:r>
-                        <a:rPr b="1"/>
-                        <a:t>0,7234</a:t>
-                      </a:r>
-                    </a:p>
-                  </a:txBody>
-                </a:tc>
-                <a:tc>
-                  <a:txBody>
-                    <a:bodyPr/>
-                    <a:lstStyle/>
-                    <a:p>
-                      <a:pPr lvl="0" indent="0" marL="0">
-                        <a:buNone/>
-                      </a:pPr>
-                      <a:r>
-                        <a:rPr/>
-                        <a:t>0,90</a:t>
-                      </a:r>
-                    </a:p>
-                  </a:txBody>
-                </a:tc>
-                <a:tc>
-                  <a:txBody>
-                    <a:bodyPr/>
-                    <a:lstStyle/>
-                    <a:p>
-                      <a:pPr lvl="0" indent="0" marL="0" algn="ctr">
-                        <a:buNone/>
-                      </a:pPr>
-                      <a:r>
-                        <a:rPr/>
-                        <a:t>❌</a:t>
-                      </a:r>
-                    </a:p>
-                  </a:txBody>
-                </a:tc>
-              </a:tr>
-              <a:tr h="0">
-                <a:tc>
-                  <a:txBody>
-                    <a:bodyPr/>
-                    <a:lstStyle/>
-                    <a:p>
-                      <a:pPr lvl="0" indent="0" marL="0">
-                        <a:buNone/>
-                      </a:pPr>
-                      <a:r>
-                        <a:rPr/>
-                        <a:t>Độ trễ p95 · trung vị, CPU</a:t>
-                      </a:r>
-                    </a:p>
-                  </a:txBody>
-                </a:tc>
-                <a:tc>
-                  <a:txBody>
-                    <a:bodyPr/>
-                    <a:lstStyle/>
-                    <a:p>
-                      <a:pPr lvl="0" indent="0" marL="0">
-                        <a:buNone/>
-                      </a:pPr>
-                      <a:r>
-                        <a:rPr b="1"/>
-                        <a:t>510</a:t>
-                      </a:r>
-                      <a:r>
-                        <a:rPr/>
-                        <a:t> · 150 ms</a:t>
-                      </a:r>
-                    </a:p>
-                  </a:txBody>
-                </a:tc>
-                <a:tc>
-                  <a:txBody>
-                    <a:bodyPr/>
-                    <a:lstStyle/>
-                    <a:p>
-                      <a:pPr lvl="0" indent="0" marL="0">
-                        <a:buNone/>
-                      </a:pPr>
-                      <a:r>
-                        <a:rPr/>
-                        <a:t>≤ 800 ms</a:t>
-                      </a:r>
-                    </a:p>
-                  </a:txBody>
-                </a:tc>
-                <a:tc>
-                  <a:txBody>
-                    <a:bodyPr/>
-                    <a:lstStyle/>
-                    <a:p>
-                      <a:pPr lvl="0" indent="0" marL="0" algn="ctr">
-                        <a:buNone/>
-                      </a:pPr>
-                      <a:r>
-                        <a:rPr/>
-                        <a:t>✅</a:t>
-                      </a:r>
-                    </a:p>
-                  </a:txBody>
-                </a:tc>
-              </a:tr>
-            </a:tbl>
-          </a:graphicData>
-        </a:graphic>
-      </p:graphicFrame>
+      <p:pic>
+        <p:nvPicPr>
+          <p:cNvPr descr="figures/fig-mon-hoc-kpi.png" id="0" name="Picture 1"/>
+          <p:cNvPicPr>
+            <a:picLocks noGrp="1" noChangeAspect="1"/>
+          </p:cNvPicPr>
+          <p:nvPr/>
+        </p:nvPicPr>
+        <p:blipFill>
+          <a:blip r:embed="rId2"/>
+          <a:stretch>
+            <a:fillRect/>
+          </a:stretch>
+        </p:blipFill>
+        <p:spPr bwMode="auto">
+          <a:xfrm>
+            <a:off x="762000" y="2781300"/>
+            <a:ext cx="10579100" cy="2933700"/>
+          </a:xfrm>
+          <a:prstGeom prst="rect">
+            <a:avLst/>
+          </a:prstGeom>
+          <a:noFill/>
+          <a:ln w="9525">
+            <a:noFill/>
+            <a:headEnd/>
+            <a:tailEnd/>
+          </a:ln>
+        </p:spPr>
+      </p:pic>
       <p:sp>
         <p:nvSpPr>
           <p:cNvPr id="449" name="Google Shape;449;p31"/>

--- a/docs/slides/12-slides-mon-hoc.pptx
+++ b/docs/slides/12-slides-mon-hoc.pptx
@@ -43733,7 +43733,12 @@
             <a:br/>
             <a:r>
               <a:rPr/>
-              <a:t>Phạm Công Thành — 25410013 · Nguyễn Minh Hiếu — 25410007</a:t>
+              <a:t>Phạm Nguyễn Thế Châu — 25410004 · Nguyễn Công Hậu — 25410006</a:t>
+            </a:r>
+            <a:br/>
+            <a:r>
+              <a:rPr/>
+              <a:t>Nguyễn Minh Hiếu — 25410007 · Phạm Công Thành — 25410013</a:t>
             </a:r>
           </a:p>
         </p:txBody>

--- a/docs/slides/12-slides-mon-hoc.pptx
+++ b/docs/slides/12-slides-mon-hoc.pptx
@@ -44944,15 +44944,45 @@
             </a:r>
             <a:r>
               <a:rPr/>
-              <a:t> — và một trong hai suy </a:t>
+              <a:t>, và mục </a:t>
+            </a:r>
+            <a:r>
+              <a:rPr>
+                <a:latin typeface="Courier"/>
+              </a:rPr>
+              <a:t>L → 1</a:t>
+            </a:r>
+            <a:r>
+              <a:rPr/>
+              <a:t> ở vị trí chữ số đoán </a:t>
             </a:r>
             <a:r>
               <a:rPr b="1"/>
-              <a:t>sai chiều</a:t>
+              <a:t>sai đích</a:t>
             </a:r>
             <a:r>
               <a:rPr/>
-              <a:t>. Thay bằng bảng trích từ ma trận đo được: phủ </a:t>
+              <a:t> — đo được </a:t>
+            </a:r>
+            <a:r>
+              <a:rPr>
+                <a:latin typeface="Courier"/>
+              </a:rPr>
+              <a:t>L</a:t>
+            </a:r>
+            <a:r>
+              <a:rPr/>
+              <a:t> thật ra là </a:t>
+            </a:r>
+            <a:r>
+              <a:rPr>
+                <a:latin typeface="Courier"/>
+              </a:rPr>
+              <a:t>4</a:t>
+            </a:r>
+            <a:r>
+              <a:rPr/>
+              <a:t> (53 lần). Bảng trích từ ma trận đo được: phủ </a:t>
             </a:r>
             <a:r>
               <a:rPr b="1"/>
@@ -45677,7 +45707,7 @@
                       </a:pPr>
                       <a:r>
                         <a:rPr b="1"/>
-                        <a:t>Thay bảng ánh xạ bằng bảng trích từ ma trận đo được</a:t>
+                        <a:t>Mở rộng bảng ánh xạ từ ma trận nhầm lẫn khi có thêm dữ liệu</a:t>
                       </a:r>
                     </a:p>
                   </a:txBody>
@@ -45692,7 +45722,7 @@
                       </a:pPr>
                       <a:r>
                         <a:rPr/>
-                        <a:t>Tối ưu hóa: dữ liệu đã có sẵn</a:t>
+                        <a:t>Vòng đầu đã +53 biển; 5 cặp còn lại chưa đủ bằng chứng</a:t>
                       </a:r>
                     </a:p>
                   </a:txBody>

--- a/docs/slides/12-slides-mon-hoc.pptx
+++ b/docs/slides/12-slides-mon-hoc.pptx
@@ -44940,49 +44940,11 @@
             <a:pPr lvl="0"/>
             <a:r>
               <a:rPr b="1"/>
-              <a:t>Bảng ánh xạ suy từ hình dạng chỉ phủ 2/10 cặp</a:t>
+              <a:t>Bảng luật suy từ hình dạng chỉ phủ 2/10 cặp nhầm phổ biến nhất</a:t>
             </a:r>
             <a:r>
               <a:rPr/>
-              <a:t>, và mục </a:t>
-            </a:r>
-            <a:r>
-              <a:rPr>
-                <a:latin typeface="Courier"/>
-              </a:rPr>
-              <a:t>L → 1</a:t>
-            </a:r>
-            <a:r>
-              <a:rPr/>
-              <a:t> ở vị trí chữ số đoán </a:t>
-            </a:r>
-            <a:r>
-              <a:rPr b="1"/>
-              <a:t>sai đích</a:t>
-            </a:r>
-            <a:r>
-              <a:rPr/>
-              <a:t> — đo được </a:t>
-            </a:r>
-            <a:r>
-              <a:rPr>
-                <a:latin typeface="Courier"/>
-              </a:rPr>
-              <a:t>L</a:t>
-            </a:r>
-            <a:r>
-              <a:rPr/>
-              <a:t> thật ra là </a:t>
-            </a:r>
-            <a:r>
-              <a:rPr>
-                <a:latin typeface="Courier"/>
-              </a:rPr>
-              <a:t>4</a:t>
-            </a:r>
-            <a:r>
-              <a:rPr/>
-              <a:t> (53 lần). Bảng trích từ ma trận đo được: phủ </a:t>
+              <a:t>; bảng trích từ ma trận đo được phủ </a:t>
             </a:r>
             <a:r>
               <a:rPr b="1"/>
@@ -44990,11 +44952,11 @@
             </a:r>
             <a:r>
               <a:rPr/>
-              <a:t>, thêm </a:t>
+              <a:t> và thêm </a:t>
             </a:r>
             <a:r>
               <a:rPr b="1"/>
-              <a:t>53 biển đúng, 0 hỏng</a:t>
+              <a:t>53 biển đúng</a:t>
             </a:r>
           </a:p>
           <a:p>
@@ -46140,15 +46102,15 @@
             <a:pPr lvl="0"/>
             <a:r>
               <a:rPr/>
-              <a:t>Chưa đạt: đọc đúng cả chuỗi </a:t>
+              <a:t>Điểm nghẽn còn lại: </a:t>
             </a:r>
             <a:r>
               <a:rPr b="1"/>
-              <a:t>0,7701</a:t>
+              <a:t>biển hai dòng</a:t>
             </a:r>
             <a:r>
               <a:rPr/>
-              <a:t> so với ngưỡng 0,85</a:t>
+              <a:t> (S₁ = 0,7234)</a:t>
             </a:r>
           </a:p>
           <a:p>

--- a/docs/slides/12-slides-mon-hoc.pptx
+++ b/docs/slides/12-slides-mon-hoc.pptx
@@ -49507,7 +49507,7 @@
             </a:r>
             <a:r>
               <a:rPr/>
-              <a:t> — riêng biển một dòng đạt 0,9541</a:t>
+              <a:t> — riêng một dòng đạt 0,9541 sau hậu xử lý</a:t>
             </a:r>
           </a:p>
         </p:txBody>

--- a/docs/slides/12-slides-mon-hoc.pptx
+++ b/docs/slides/12-slides-mon-hoc.pptx
@@ -45270,8 +45270,8 @@
         </p:blipFill>
         <p:spPr bwMode="auto">
           <a:xfrm>
-            <a:off x="2971800" y="2324100"/>
-            <a:ext cx="6159500" cy="3848100"/>
+            <a:off x="1981200" y="2324100"/>
+            <a:ext cx="8153400" cy="3848100"/>
           </a:xfrm>
           <a:prstGeom prst="rect">
             <a:avLst/>
